--- a/lesson2 turtle/שיעור הצב המצייר.pptx
+++ b/lesson2 turtle/שיעור הצב המצייר.pptx
@@ -22,6 +22,7 @@
     <p:sldId id="267" r:id="rId13"/>
     <p:sldId id="268" r:id="rId14"/>
     <p:sldId id="269" r:id="rId15"/>
+    <p:sldId id="271" r:id="rId22"/>
     <p:sldId id="270" r:id="rId16"/>
   </p:sldIdLst>
   <p:sldSz cx="12192000" cy="6858000"/>
@@ -903,6 +904,87 @@
 </p:notes>
 </file>
 
+<file path=ppt/notesSlides/notesSlide16.xml><?xml version="1.0" encoding="utf-8"?>
+<p:notes xmlns:a="http://schemas.openxmlformats.org/drawingml/2006/main" xmlns:p="http://schemas.openxmlformats.org/presentationml/2006/main" xmlns:r="http://schemas.openxmlformats.org/officeDocument/2006/relationships">
+  <p:cSld>
+    <p:spTree>
+      <p:nvGrpSpPr>
+        <p:cNvPr id="1" name=""/>
+        <p:cNvGrpSpPr/>
+        <p:nvPr/>
+      </p:nvGrpSpPr>
+      <p:grpSpPr>
+        <a:xfrm>
+          <a:off x="0" y="0"/>
+          <a:ext cx="0" cy="0"/>
+          <a:chOff x="0" y="0"/>
+          <a:chExt cx="0" cy="0"/>
+        </a:xfrm>
+      </p:grpSpPr>
+      <p:sp>
+        <p:nvSpPr>
+          <p:cNvPr id="2" name="Slide Image Placeholder 1"/>
+          <p:cNvSpPr>
+            <a:spLocks noGrp="1" noRot="1" noChangeAspect="1"/>
+          </p:cNvSpPr>
+          <p:nvPr>
+            <p:ph type="sldImg"/>
+          </p:nvPr>
+        </p:nvSpPr>
+        <p:spPr/>
+      </p:sp>
+      <p:sp>
+        <p:nvSpPr>
+          <p:cNvPr id="3" name="Notes Placeholder 2"/>
+          <p:cNvSpPr>
+            <a:spLocks noGrp="1"/>
+          </p:cNvSpPr>
+          <p:nvPr>
+            <p:ph type="body" idx="1"/>
+          </p:nvPr>
+        </p:nvSpPr>
+        <p:spPr/>
+        <p:txBody>
+          <a:bodyPr/>
+          <a:lstStyle/>
+          <a:p>
+            <a:r>
+              <a:t>4 דק'. הדגמה בלבד - לא צריך להבין כל שורה. turtle7.py: תנו לתלמיד לשלוט בצב מול הכיתה. turtle_game.py: תחרות קצרה - מי מגיע לניקוד הגבוה ביותר. פקודות חדשות: onkey, onclick, ontimer ו-def (פונקציה) - נלמד בהמשך.</a:t>
+            </a:r>
+          </a:p>
+        </p:txBody>
+      </p:sp>
+      <p:sp>
+        <p:nvSpPr>
+          <p:cNvPr id="4" name="Slide Number Placeholder 3"/>
+          <p:cNvSpPr>
+            <a:spLocks noGrp="1"/>
+          </p:cNvSpPr>
+          <p:nvPr>
+            <p:ph type="sldNum" sz="quarter" idx="10"/>
+          </p:nvPr>
+        </p:nvSpPr>
+        <p:spPr/>
+        <p:txBody>
+          <a:bodyPr/>
+          <a:lstStyle/>
+          <a:p>
+            <a:fld id="{F7021451-1387-4CA6-816F-3879F97B5CBC}" type="slidenum">
+              <a:rPr lang="en-US"/>
+              <a:t>12</a:t>
+            </a:fld>
+            <a:endParaRPr lang="en-US"/>
+          </a:p>
+        </p:txBody>
+      </p:sp>
+    </p:spTree>
+  </p:cSld>
+  <p:clrMapOvr>
+    <a:masterClrMapping/>
+  </p:clrMapOvr>
+</p:notes>
+</file>
+
 <file path=ppt/notesSlides/notesSlide2.xml><?xml version="1.0" encoding="utf-8"?>
 <p:notes xmlns:a="http://schemas.openxmlformats.org/drawingml/2006/main" xmlns:r="http://schemas.openxmlformats.org/officeDocument/2006/relationships" xmlns:p="http://schemas.openxmlformats.org/presentationml/2006/main">
   <p:cSld>
@@ -1296,8 +1378,7 @@
           <a:lstStyle/>
           <a:p>
             <a:r>
-              <a:rPr lang="en-US" dirty="0"/>
-              <a:t>4 דק'. בקשו מתלמיד לקום ולהיות 'הצב' - הכיתה נותנת לו פקודות. תשובת החידה: משולש שווה צלעות. left = שמאלה, right = ימינה.</a:t>
+              <a:t>4 דק'. בקשו מתלמיד לקום ולהיות 'הצב' - הכיתה נותנת לו פקודות. תשובת החידה: משולש שווה צלעות. left = שמאלה, right = ימינה. שימו לב: הזווית בתוך משולש שווה צלעות היא 60, אבל הצב מסתובב 120 (180 פחות 60). בריבוע שתיהן 90 ולכן זה לא מבלבל.</a:t>
             </a:r>
           </a:p>
         </p:txBody>
@@ -9305,6 +9386,551 @@
 </p:sld>
 </file>
 
+<file path=ppt/slides/slide16.xml><?xml version="1.0" encoding="utf-8"?>
+<p:sld xmlns:a="http://schemas.openxmlformats.org/drawingml/2006/main" xmlns:p="http://schemas.openxmlformats.org/presentationml/2006/main" xmlns:r="http://schemas.openxmlformats.org/officeDocument/2006/relationships">
+  <p:cSld>
+    <p:spTree>
+      <p:nvGrpSpPr>
+        <p:cNvPr id="1" name=""/>
+        <p:cNvGrpSpPr/>
+        <p:nvPr/>
+      </p:nvGrpSpPr>
+      <p:grpSpPr/>
+      <p:sp>
+        <p:nvSpPr>
+          <p:cNvPr id="2" name="Text 0"/>
+          <p:cNvSpPr>
+            <a:spLocks noGrp="1"/>
+          </p:cNvSpPr>
+          <p:nvPr>
+            <p:ph type="title" idx="100" hasCustomPrompt="1"/>
+          </p:nvPr>
+        </p:nvSpPr>
+        <p:spPr>
+          <a:xfrm>
+            <a:off x="548640" y="274320"/>
+            <a:ext cx="11091672" cy="822960"/>
+          </a:xfrm>
+          <a:prstGeom prst="rect">
+            <a:avLst/>
+          </a:prstGeom>
+          <a:noFill/>
+          <a:ln/>
+        </p:spPr>
+        <p:txBody>
+          <a:bodyPr wrap="square" lIns="0" tIns="0" rIns="0" bIns="0" rtlCol="0" anchor="ctr"/>
+          <a:lstStyle/>
+          <a:p>
+            <a:pPr marL="0" indent="0" algn="r" rtl="1">
+              <a:buNone/>
+            </a:pPr>
+            <a:r>
+              <a:rPr lang="en-US" sz="3600" b="1" dirty="0" err="1">
+                <a:solidFill>
+                  <a:schemeClr val="tx2"/>
+                </a:solidFill>
+              </a:rPr>
+              <a:t>בונוס: הצב יודע גם לשחק!</a:t>
+            </a:r>
+            <a:endParaRPr lang="en-US" sz="3600" dirty="0"/>
+          </a:p>
+        </p:txBody>
+      </p:sp>
+      <p:sp>
+        <p:nvSpPr>
+          <p:cNvPr id="2" name="Title 1"/>
+          <p:cNvSpPr>
+            <a:spLocks noGrp="1"/>
+          </p:cNvSpPr>
+          <p:nvPr>
+            <p:ph type="title" idx="100"/>
+          </p:nvPr>
+        </p:nvSpPr>
+        <p:spPr/>
+        <p:txBody>
+          <a:bodyPr/>
+          <a:lstStyle/>
+          <a:p/>
+        </p:txBody>
+      </p:sp>
+      <p:sp>
+        <p:nvSpPr>
+          <p:cNvPr id="3" name="Rounded Rectangle 2"/>
+          <p:cNvSpPr/>
+          <p:nvPr/>
+        </p:nvSpPr>
+        <p:spPr>
+          <a:xfrm>
+            <a:off x="6336792" y="1325880"/>
+            <a:ext cx="5303520" cy="2971800"/>
+          </a:xfrm>
+          <a:prstGeom prst="roundRect">
+            <a:avLst>
+              <a:gd name="adj" fmla="val 8000"/>
+            </a:avLst>
+          </a:prstGeom>
+          <a:solidFill>
+            <a:srgbClr val="FFFFFF"/>
+          </a:solidFill>
+          <a:ln w="12700">
+            <a:solidFill>
+              <a:srgbClr val="D8E8DE"/>
+            </a:solidFill>
+          </a:ln>
+          <a:effectLst/>
+        </p:spPr>
+        <p:style>
+          <a:lnRef idx="1">
+            <a:schemeClr val="accent1"/>
+          </a:lnRef>
+          <a:fillRef idx="3">
+            <a:schemeClr val="accent1"/>
+          </a:fillRef>
+          <a:effectRef idx="2">
+            <a:schemeClr val="accent1"/>
+          </a:effectRef>
+          <a:fontRef idx="minor">
+            <a:schemeClr val="lt1"/>
+          </a:fontRef>
+        </p:style>
+        <p:txBody>
+          <a:bodyPr rtlCol="0" anchor="ctr"/>
+          <a:lstStyle/>
+          <a:p/>
+        </p:txBody>
+      </p:sp>
+      <p:pic>
+        <p:nvPicPr>
+          <p:cNvPr id="4" name="Picture 3" descr="keysc.png"/>
+          <p:cNvPicPr>
+            <a:picLocks noChangeAspect="1"/>
+          </p:cNvPicPr>
+          <p:nvPr/>
+        </p:nvPicPr>
+        <p:blipFill>
+          <a:blip r:embed="rId2"/>
+          <a:stretch>
+            <a:fillRect/>
+          </a:stretch>
+        </p:blipFill>
+        <p:spPr>
+          <a:xfrm>
+            <a:off x="7296912" y="1463040"/>
+            <a:ext cx="3379154" cy="2697480"/>
+          </a:xfrm>
+          <a:prstGeom prst="rect">
+            <a:avLst/>
+          </a:prstGeom>
+        </p:spPr>
+      </p:pic>
+      <p:sp>
+        <p:nvSpPr>
+          <p:cNvPr id="5" name="TextBox 4"/>
+          <p:cNvSpPr txBox="1"/>
+          <p:nvPr/>
+        </p:nvSpPr>
+        <p:spPr>
+          <a:xfrm>
+            <a:off x="6336792" y="4434840"/>
+            <a:ext cx="5303520" cy="457200"/>
+          </a:xfrm>
+          <a:prstGeom prst="rect">
+            <a:avLst/>
+          </a:prstGeom>
+          <a:noFill/>
+        </p:spPr>
+        <p:txBody>
+          <a:bodyPr wrap="square" anchor="t" lIns="0" rIns="0" tIns="0" bIns="0">
+            <a:spAutoFit/>
+          </a:bodyPr>
+          <a:lstStyle/>
+          <a:p>
+            <a:pPr algn="r" rtl="1">
+              <a:spcAft>
+                <a:spcPts val="400"/>
+              </a:spcAft>
+            </a:pPr>
+            <a:r>
+              <a:rPr sz="2200" b="1">
+                <a:solidFill>
+                  <a:srgbClr val="2D9F5C"/>
+                </a:solidFill>
+                <a:latin typeface="Arial"/>
+              </a:rPr>
+              <a:t>ציור עם המקלדת</a:t>
+            </a:r>
+          </a:p>
+        </p:txBody>
+      </p:sp>
+      <p:sp>
+        <p:nvSpPr>
+          <p:cNvPr id="6" name="TextBox 5"/>
+          <p:cNvSpPr txBox="1"/>
+          <p:nvPr/>
+        </p:nvSpPr>
+        <p:spPr>
+          <a:xfrm>
+            <a:off x="6336792" y="4892040"/>
+            <a:ext cx="5303520" cy="914400"/>
+          </a:xfrm>
+          <a:prstGeom prst="rect">
+            <a:avLst/>
+          </a:prstGeom>
+          <a:noFill/>
+        </p:spPr>
+        <p:txBody>
+          <a:bodyPr wrap="square" anchor="t" lIns="0" rIns="0" tIns="0" bIns="0">
+            <a:spAutoFit/>
+          </a:bodyPr>
+          <a:lstStyle/>
+          <a:p>
+            <a:pPr algn="r" rtl="1">
+              <a:spcAft>
+                <a:spcPts val="400"/>
+              </a:spcAft>
+            </a:pPr>
+            <a:r>
+              <a:rPr sz="1600" b="0">
+                <a:solidFill>
+                  <a:srgbClr val="1B2B34"/>
+                </a:solidFill>
+                <a:latin typeface="Arial"/>
+              </a:rPr>
+              <a:t>חיצים - הזזת הצב</a:t>
+            </a:r>
+          </a:p>
+          <a:p>
+            <a:pPr algn="r" rtl="1">
+              <a:spcAft>
+                <a:spcPts val="400"/>
+              </a:spcAft>
+            </a:pPr>
+            <a:r>
+              <a:rPr sz="1600" b="0">
+                <a:solidFill>
+                  <a:srgbClr val="1B2B34"/>
+                </a:solidFill>
+                <a:latin typeface="Arial"/>
+              </a:rPr>
+              <a:t>רווח - הרמת / הורדת העט</a:t>
+            </a:r>
+          </a:p>
+          <a:p>
+            <a:pPr algn="r" rtl="1">
+              <a:spcAft>
+                <a:spcPts val="400"/>
+              </a:spcAft>
+            </a:pPr>
+            <a:r>
+              <a:rPr sz="1600" b="0">
+                <a:solidFill>
+                  <a:srgbClr val="1B2B34"/>
+                </a:solidFill>
+                <a:latin typeface="Arial"/>
+              </a:rPr>
+              <a:t>c - מחיקת הציור</a:t>
+            </a:r>
+          </a:p>
+        </p:txBody>
+      </p:sp>
+      <p:sp>
+        <p:nvSpPr>
+          <p:cNvPr id="7" name="Rounded Rectangle 6"/>
+          <p:cNvSpPr/>
+          <p:nvPr/>
+        </p:nvSpPr>
+        <p:spPr>
+          <a:xfrm>
+            <a:off x="9262872" y="5806440"/>
+            <a:ext cx="2377440" cy="457200"/>
+          </a:xfrm>
+          <a:prstGeom prst="roundRect">
+            <a:avLst>
+              <a:gd name="adj" fmla="val 50000"/>
+            </a:avLst>
+          </a:prstGeom>
+          <a:solidFill>
+            <a:srgbClr val="FF9F1C"/>
+          </a:solidFill>
+          <a:ln>
+            <a:noFill/>
+          </a:ln>
+          <a:effectLst/>
+        </p:spPr>
+        <p:style>
+          <a:lnRef idx="1">
+            <a:schemeClr val="accent1"/>
+          </a:lnRef>
+          <a:fillRef idx="3">
+            <a:schemeClr val="accent1"/>
+          </a:fillRef>
+          <a:effectRef idx="2">
+            <a:schemeClr val="accent1"/>
+          </a:effectRef>
+          <a:fontRef idx="minor">
+            <a:schemeClr val="lt1"/>
+          </a:fontRef>
+        </p:style>
+        <p:txBody>
+          <a:bodyPr rtlCol="0" anchor="ctr" lIns="0" rIns="0"/>
+          <a:lstStyle/>
+          <a:p>
+            <a:pPr algn="ctr"/>
+            <a:r>
+              <a:rPr sz="1600" b="1">
+                <a:solidFill>
+                  <a:srgbClr val="FFFFFF"/>
+                </a:solidFill>
+                <a:latin typeface="Arial"/>
+              </a:rPr>
+              <a:t>turtle7.py</a:t>
+            </a:r>
+          </a:p>
+        </p:txBody>
+      </p:sp>
+      <p:sp>
+        <p:nvSpPr>
+          <p:cNvPr id="8" name="Rounded Rectangle 7"/>
+          <p:cNvSpPr/>
+          <p:nvPr/>
+        </p:nvSpPr>
+        <p:spPr>
+          <a:xfrm>
+            <a:off x="548640" y="1325880"/>
+            <a:ext cx="5303520" cy="2971800"/>
+          </a:xfrm>
+          <a:prstGeom prst="roundRect">
+            <a:avLst>
+              <a:gd name="adj" fmla="val 8000"/>
+            </a:avLst>
+          </a:prstGeom>
+          <a:solidFill>
+            <a:srgbClr val="FFFFFF"/>
+          </a:solidFill>
+          <a:ln w="12700">
+            <a:solidFill>
+              <a:srgbClr val="D8E8DE"/>
+            </a:solidFill>
+          </a:ln>
+          <a:effectLst/>
+        </p:spPr>
+        <p:style>
+          <a:lnRef idx="1">
+            <a:schemeClr val="accent1"/>
+          </a:lnRef>
+          <a:fillRef idx="3">
+            <a:schemeClr val="accent1"/>
+          </a:fillRef>
+          <a:effectRef idx="2">
+            <a:schemeClr val="accent1"/>
+          </a:effectRef>
+          <a:fontRef idx="minor">
+            <a:schemeClr val="lt1"/>
+          </a:fontRef>
+        </p:style>
+        <p:txBody>
+          <a:bodyPr rtlCol="0" anchor="ctr"/>
+          <a:lstStyle/>
+          <a:p/>
+        </p:txBody>
+      </p:sp>
+      <p:pic>
+        <p:nvPicPr>
+          <p:cNvPr id="9" name="Picture 8" descr="game_midc.png"/>
+          <p:cNvPicPr>
+            <a:picLocks noChangeAspect="1"/>
+          </p:cNvPicPr>
+          <p:nvPr/>
+        </p:nvPicPr>
+        <p:blipFill>
+          <a:blip r:embed="rId3"/>
+          <a:stretch>
+            <a:fillRect/>
+          </a:stretch>
+        </p:blipFill>
+        <p:spPr>
+          <a:xfrm>
+            <a:off x="1508760" y="1463040"/>
+            <a:ext cx="3379154" cy="2697480"/>
+          </a:xfrm>
+          <a:prstGeom prst="rect">
+            <a:avLst/>
+          </a:prstGeom>
+        </p:spPr>
+      </p:pic>
+      <p:sp>
+        <p:nvSpPr>
+          <p:cNvPr id="10" name="TextBox 9"/>
+          <p:cNvSpPr txBox="1"/>
+          <p:nvPr/>
+        </p:nvSpPr>
+        <p:spPr>
+          <a:xfrm>
+            <a:off x="548640" y="4434840"/>
+            <a:ext cx="5303520" cy="457200"/>
+          </a:xfrm>
+          <a:prstGeom prst="rect">
+            <a:avLst/>
+          </a:prstGeom>
+          <a:noFill/>
+        </p:spPr>
+        <p:txBody>
+          <a:bodyPr wrap="square" anchor="t" lIns="0" rIns="0" tIns="0" bIns="0">
+            <a:spAutoFit/>
+          </a:bodyPr>
+          <a:lstStyle/>
+          <a:p>
+            <a:pPr algn="r" rtl="1">
+              <a:spcAft>
+                <a:spcPts val="400"/>
+              </a:spcAft>
+            </a:pPr>
+            <a:r>
+              <a:rPr sz="2200" b="1">
+                <a:solidFill>
+                  <a:srgbClr val="EF476F"/>
+                </a:solidFill>
+                <a:latin typeface="Arial"/>
+              </a:rPr>
+              <a:t>משחק: תפסו את הצב!</a:t>
+            </a:r>
+          </a:p>
+        </p:txBody>
+      </p:sp>
+      <p:sp>
+        <p:nvSpPr>
+          <p:cNvPr id="11" name="TextBox 10"/>
+          <p:cNvSpPr txBox="1"/>
+          <p:nvPr/>
+        </p:nvSpPr>
+        <p:spPr>
+          <a:xfrm>
+            <a:off x="548640" y="4892040"/>
+            <a:ext cx="5303520" cy="914400"/>
+          </a:xfrm>
+          <a:prstGeom prst="rect">
+            <a:avLst/>
+          </a:prstGeom>
+          <a:noFill/>
+        </p:spPr>
+        <p:txBody>
+          <a:bodyPr wrap="square" anchor="t" lIns="0" rIns="0" tIns="0" bIns="0">
+            <a:spAutoFit/>
+          </a:bodyPr>
+          <a:lstStyle/>
+          <a:p>
+            <a:pPr algn="r" rtl="1">
+              <a:spcAft>
+                <a:spcPts val="400"/>
+              </a:spcAft>
+            </a:pPr>
+            <a:r>
+              <a:rPr sz="1600" b="0">
+                <a:solidFill>
+                  <a:srgbClr val="1B2B34"/>
+                </a:solidFill>
+                <a:latin typeface="Arial"/>
+              </a:rPr>
+              <a:t>לחיצה על הצב - נקודה</a:t>
+            </a:r>
+          </a:p>
+          <a:p>
+            <a:pPr algn="r" rtl="1">
+              <a:spcAft>
+                <a:spcPts val="400"/>
+              </a:spcAft>
+            </a:pPr>
+            <a:r>
+              <a:rPr sz="1600" b="0">
+                <a:solidFill>
+                  <a:srgbClr val="1B2B34"/>
+                </a:solidFill>
+                <a:latin typeface="Arial"/>
+              </a:rPr>
+              <a:t>יש לכם 30 שניות</a:t>
+            </a:r>
+          </a:p>
+          <a:p>
+            <a:pPr algn="r" rtl="1">
+              <a:spcAft>
+                <a:spcPts val="400"/>
+              </a:spcAft>
+            </a:pPr>
+            <a:r>
+              <a:rPr sz="1600" b="0">
+                <a:solidFill>
+                  <a:srgbClr val="1B2B34"/>
+                </a:solidFill>
+                <a:latin typeface="Arial"/>
+              </a:rPr>
+              <a:t>כמה תצליחו לצבור?</a:t>
+            </a:r>
+          </a:p>
+        </p:txBody>
+      </p:sp>
+      <p:sp>
+        <p:nvSpPr>
+          <p:cNvPr id="12" name="Rounded Rectangle 11"/>
+          <p:cNvSpPr/>
+          <p:nvPr/>
+        </p:nvSpPr>
+        <p:spPr>
+          <a:xfrm>
+            <a:off x="3474719" y="5806440"/>
+            <a:ext cx="2377440" cy="457200"/>
+          </a:xfrm>
+          <a:prstGeom prst="roundRect">
+            <a:avLst>
+              <a:gd name="adj" fmla="val 50000"/>
+            </a:avLst>
+          </a:prstGeom>
+          <a:solidFill>
+            <a:srgbClr val="FF9F1C"/>
+          </a:solidFill>
+          <a:ln>
+            <a:noFill/>
+          </a:ln>
+          <a:effectLst/>
+        </p:spPr>
+        <p:style>
+          <a:lnRef idx="1">
+            <a:schemeClr val="accent1"/>
+          </a:lnRef>
+          <a:fillRef idx="3">
+            <a:schemeClr val="accent1"/>
+          </a:fillRef>
+          <a:effectRef idx="2">
+            <a:schemeClr val="accent1"/>
+          </a:effectRef>
+          <a:fontRef idx="minor">
+            <a:schemeClr val="lt1"/>
+          </a:fontRef>
+        </p:style>
+        <p:txBody>
+          <a:bodyPr rtlCol="0" anchor="ctr" lIns="0" rIns="0"/>
+          <a:lstStyle/>
+          <a:p>
+            <a:pPr algn="ctr"/>
+            <a:r>
+              <a:rPr sz="1600" b="1">
+                <a:solidFill>
+                  <a:srgbClr val="FFFFFF"/>
+                </a:solidFill>
+                <a:latin typeface="Arial"/>
+              </a:rPr>
+              <a:t>turtle_game.py</a:t>
+            </a:r>
+          </a:p>
+        </p:txBody>
+      </p:sp>
+    </p:spTree>
+  </p:cSld>
+  <p:clrMapOvr>
+    <a:masterClrMapping/>
+  </p:clrMapOvr>
+</p:sld>
+</file>
+
 <file path=ppt/slides/slide2.xml><?xml version="1.0" encoding="utf-8"?>
 <p:sld xmlns:a="http://schemas.openxmlformats.org/drawingml/2006/main" xmlns:r="http://schemas.openxmlformats.org/officeDocument/2006/relationships" xmlns:p="http://schemas.openxmlformats.org/presentationml/2006/main">
   <p:cSld name="Slide 2">
@@ -13289,6 +13915,10 @@
             <a:prstDash val="solid"/>
           </a:ln>
         </p:spPr>
+        <p:txBody>
+          <a:bodyPr/>
+          <a:p/>
+        </p:txBody>
       </p:sp>
       <p:sp>
         <p:nvSpPr>
@@ -13388,6 +14018,10 @@
             <a:prstDash val="solid"/>
           </a:ln>
         </p:spPr>
+        <p:txBody>
+          <a:bodyPr/>
+          <a:p/>
+        </p:txBody>
       </p:sp>
       <p:sp>
         <p:nvSpPr>
@@ -13469,7 +14103,7 @@
             </a:pPr>
             <a:r>
               <a:rPr lang="en-US" dirty="0"/>
-              <a:t>3 * 130 = 360</a:t>
+              <a:t>3 * 120 = 360</a:t>
             </a:r>
             <a:endParaRPr lang="he-IL" sz="1800" dirty="0"/>
           </a:p>
@@ -13501,6 +14135,10 @@
             <a:prstDash val="solid"/>
           </a:ln>
         </p:spPr>
+        <p:txBody>
+          <a:bodyPr/>
+          <a:p/>
+        </p:txBody>
       </p:sp>
       <p:sp>
         <p:nvSpPr>
@@ -13600,6 +14238,10 @@
             <a:prstDash val="solid"/>
           </a:ln>
         </p:spPr>
+        <p:txBody>
+          <a:bodyPr/>
+          <a:p/>
+        </p:txBody>
       </p:sp>
       <p:sp>
         <p:nvSpPr>
@@ -13699,6 +14341,10 @@
             <a:prstDash val="solid"/>
           </a:ln>
         </p:spPr>
+        <p:txBody>
+          <a:bodyPr/>
+          <a:p/>
+        </p:txBody>
       </p:sp>
       <p:sp>
         <p:nvSpPr>
@@ -13724,6 +14370,10 @@
             <a:prstDash val="solid"/>
           </a:ln>
         </p:spPr>
+        <p:txBody>
+          <a:bodyPr/>
+          <a:p/>
+        </p:txBody>
       </p:sp>
       <p:pic>
         <p:nvPicPr>
@@ -13854,6 +14504,10 @@
             </a:outerShdw>
           </a:effectLst>
         </p:spPr>
+        <p:txBody>
+          <a:bodyPr/>
+          <a:p/>
+        </p:txBody>
       </p:sp>
       <p:sp>
         <p:nvSpPr>

--- a/lesson2 turtle/שיעור הצב המצייר.pptx
+++ b/lesson2 turtle/שיעור הצב המצייר.pptx
@@ -5,7 +5,7 @@
     <p:sldMasterId id="2147483648" r:id="rId1"/>
   </p:sldMasterIdLst>
   <p:notesMasterIdLst>
-    <p:notesMasterId r:id="rId17"/>
+    <p:notesMasterId r:id="rId18"/>
   </p:notesMasterIdLst>
   <p:sldIdLst>
     <p:sldId id="256" r:id="rId2"/>
@@ -22,8 +22,8 @@
     <p:sldId id="267" r:id="rId13"/>
     <p:sldId id="268" r:id="rId14"/>
     <p:sldId id="269" r:id="rId15"/>
-    <p:sldId id="271" r:id="rId22"/>
-    <p:sldId id="270" r:id="rId16"/>
+    <p:sldId id="271" r:id="rId16"/>
+    <p:sldId id="270" r:id="rId17"/>
   </p:sldIdLst>
   <p:sldSz cx="12192000" cy="6858000"/>
   <p:notesSz cx="6858000" cy="12192000"/>
@@ -158,6 +158,7 @@
           <p14:sldIdLst>
             <p14:sldId id="268"/>
             <p14:sldId id="269"/>
+            <p14:sldId id="271"/>
             <p14:sldId id="270"/>
           </p14:sldIdLst>
         </p14:section>
@@ -862,8 +863,7 @@
           <a:lstStyle/>
           <a:p>
             <a:r>
-              <a:rPr lang="en-US" dirty="0"/>
-              <a:t>3 דק'. הקובץ homework_turtle.py כבר מכיל את רשימת הדרישות ושלד קוד. פתרון לדוגמה למורה: teacher/homework_solution.py. בדיקה: מריצים את הקובץ ובודקים כל סעיף.</a:t>
+              <a:t>4 דק'. הדגמה בלבד - לא צריך להבין כל שורה. turtle7.py: תנו לתלמיד לשלוט בצב מול הכיתה. turtle_game.py: תחרות קצרה - מי מגיע לניקוד הגבוה ביותר. פקודות חדשות: onkey, onclick, ontimer ו-def (פונקציה) - נלמד בהמשך.</a:t>
             </a:r>
           </a:p>
         </p:txBody>
@@ -892,11 +892,6 @@
         </p:txBody>
       </p:sp>
     </p:spTree>
-    <p:extLst>
-      <p:ext uri="{BB962C8B-B14F-4D97-AF65-F5344CB8AC3E}">
-        <p14:creationId xmlns:p14="http://schemas.microsoft.com/office/powerpoint/2010/main" val="1024086991"/>
-      </p:ext>
-    </p:extLst>
   </p:cSld>
   <p:clrMapOvr>
     <a:masterClrMapping/>
@@ -905,7 +900,7 @@
 </file>
 
 <file path=ppt/notesSlides/notesSlide16.xml><?xml version="1.0" encoding="utf-8"?>
-<p:notes xmlns:a="http://schemas.openxmlformats.org/drawingml/2006/main" xmlns:p="http://schemas.openxmlformats.org/presentationml/2006/main" xmlns:r="http://schemas.openxmlformats.org/officeDocument/2006/relationships">
+<p:notes xmlns:a="http://schemas.openxmlformats.org/drawingml/2006/main" xmlns:r="http://schemas.openxmlformats.org/officeDocument/2006/relationships" xmlns:p="http://schemas.openxmlformats.org/presentationml/2006/main">
   <p:cSld>
     <p:spTree>
       <p:nvGrpSpPr>
@@ -949,7 +944,8 @@
           <a:lstStyle/>
           <a:p>
             <a:r>
-              <a:t>4 דק'. הדגמה בלבד - לא צריך להבין כל שורה. turtle7.py: תנו לתלמיד לשלוט בצב מול הכיתה. turtle_game.py: תחרות קצרה - מי מגיע לניקוד הגבוה ביותר. פקודות חדשות: onkey, onclick, ontimer ו-def (פונקציה) - נלמד בהמשך.</a:t>
+              <a:rPr lang="en-US" dirty="0"/>
+              <a:t>3 דק'. הקובץ homework_turtle.py כבר מכיל את רשימת הדרישות ושלד קוד. פתרון לדוגמה למורה: teacher/homework_solution.py. בדיקה: מריצים את הקובץ ובודקים כל סעיף.</a:t>
             </a:r>
           </a:p>
         </p:txBody>
@@ -971,13 +967,18 @@
           <a:p>
             <a:fld id="{F7021451-1387-4CA6-816F-3879F97B5CBC}" type="slidenum">
               <a:rPr lang="en-US"/>
-              <a:t>12</a:t>
+              <a:t>16</a:t>
             </a:fld>
             <a:endParaRPr lang="en-US"/>
           </a:p>
         </p:txBody>
       </p:sp>
     </p:spTree>
+    <p:extLst>
+      <p:ext uri="{BB962C8B-B14F-4D97-AF65-F5344CB8AC3E}">
+        <p14:creationId xmlns:p14="http://schemas.microsoft.com/office/powerpoint/2010/main" val="1024086991"/>
+      </p:ext>
+    </p:extLst>
   </p:cSld>
   <p:clrMapOvr>
     <a:masterClrMapping/>
@@ -1829,7 +1830,7 @@
           </a:prstGeom>
           <a:extLst>
             <a:ext uri="{C572A759-6A51-4108-AA02-DFA0A04FC94B}">
-              <ma14:wrappingTextBoxFlag xmlns:ma14="http://schemas.microsoft.com/office/mac/drawingml/2011/main" xmlns="" val="0"/>
+              <ma14:wrappingTextBoxFlag xmlns="" xmlns:ma14="http://schemas.microsoft.com/office/mac/drawingml/2011/main" val="0"/>
             </a:ext>
           </a:extLst>
         </p:spPr>
@@ -1904,7 +1905,7 @@
           </a:prstGeom>
           <a:extLst>
             <a:ext uri="{C572A759-6A51-4108-AA02-DFA0A04FC94B}">
-              <ma14:wrappingTextBoxFlag xmlns:ma14="http://schemas.microsoft.com/office/mac/drawingml/2011/main" xmlns="" val="0"/>
+              <ma14:wrappingTextBoxFlag xmlns="" xmlns:ma14="http://schemas.microsoft.com/office/mac/drawingml/2011/main" val="0"/>
             </a:ext>
           </a:extLst>
         </p:spPr>
@@ -4250,7 +4251,7 @@
           </a:prstGeom>
           <a:extLst>
             <a:ext uri="{C572A759-6A51-4108-AA02-DFA0A04FC94B}">
-              <ma14:wrappingTextBoxFlag xmlns:ma14="http://schemas.microsoft.com/office/mac/drawingml/2011/main" xmlns="" val="0"/>
+              <ma14:wrappingTextBoxFlag xmlns="" xmlns:ma14="http://schemas.microsoft.com/office/mac/drawingml/2011/main" val="0"/>
             </a:ext>
           </a:extLst>
         </p:spPr>
@@ -5123,7 +5124,7 @@
           </a:prstGeom>
           <a:extLst>
             <a:ext uri="{C572A759-6A51-4108-AA02-DFA0A04FC94B}">
-              <ma14:wrappingTextBoxFlag xmlns:ma14="http://schemas.microsoft.com/office/mac/drawingml/2011/main" xmlns="" val="0"/>
+              <ma14:wrappingTextBoxFlag xmlns="" xmlns:ma14="http://schemas.microsoft.com/office/mac/drawingml/2011/main" val="0"/>
             </a:ext>
           </a:extLst>
         </p:spPr>
@@ -5944,7 +5945,7 @@
           </a:prstGeom>
           <a:extLst>
             <a:ext uri="{C572A759-6A51-4108-AA02-DFA0A04FC94B}">
-              <ma14:wrappingTextBoxFlag xmlns:ma14="http://schemas.microsoft.com/office/mac/drawingml/2011/main" xmlns="" val="0"/>
+              <ma14:wrappingTextBoxFlag xmlns="" xmlns:ma14="http://schemas.microsoft.com/office/mac/drawingml/2011/main" val="0"/>
             </a:ext>
           </a:extLst>
         </p:spPr>
@@ -7593,7 +7594,7 @@
           </a:prstGeom>
           <a:extLst>
             <a:ext uri="{C572A759-6A51-4108-AA02-DFA0A04FC94B}">
-              <ma14:wrappingTextBoxFlag xmlns:ma14="http://schemas.microsoft.com/office/mac/drawingml/2011/main" xmlns="" val="0"/>
+              <ma14:wrappingTextBoxFlag xmlns="" xmlns:ma14="http://schemas.microsoft.com/office/mac/drawingml/2011/main" val="0"/>
             </a:ext>
           </a:extLst>
         </p:spPr>
@@ -8380,7 +8381,7 @@
           </a:prstGeom>
           <a:extLst>
             <a:ext uri="{C572A759-6A51-4108-AA02-DFA0A04FC94B}">
-              <ma14:wrappingTextBoxFlag xmlns:ma14="http://schemas.microsoft.com/office/mac/drawingml/2011/main" xmlns="" val="0"/>
+              <ma14:wrappingTextBoxFlag xmlns="" xmlns:ma14="http://schemas.microsoft.com/office/mac/drawingml/2011/main" val="0"/>
             </a:ext>
           </a:extLst>
         </p:spPr>
@@ -8414,6 +8415,545 @@
 </file>
 
 <file path=ppt/slides/slide15.xml><?xml version="1.0" encoding="utf-8"?>
+<p:sld xmlns:a="http://schemas.openxmlformats.org/drawingml/2006/main" xmlns:r="http://schemas.openxmlformats.org/officeDocument/2006/relationships" xmlns:p="http://schemas.openxmlformats.org/presentationml/2006/main">
+  <p:cSld>
+    <p:spTree>
+      <p:nvGrpSpPr>
+        <p:cNvPr id="1" name=""/>
+        <p:cNvGrpSpPr/>
+        <p:nvPr/>
+      </p:nvGrpSpPr>
+      <p:grpSpPr>
+        <a:xfrm>
+          <a:off x="0" y="0"/>
+          <a:ext cx="0" cy="0"/>
+          <a:chOff x="0" y="0"/>
+          <a:chExt cx="0" cy="0"/>
+        </a:xfrm>
+      </p:grpSpPr>
+      <p:sp>
+        <p:nvSpPr>
+          <p:cNvPr id="2" name="Text 0"/>
+          <p:cNvSpPr>
+            <a:spLocks noGrp="1"/>
+          </p:cNvSpPr>
+          <p:nvPr>
+            <p:ph type="title" idx="100" hasCustomPrompt="1"/>
+          </p:nvPr>
+        </p:nvSpPr>
+        <p:spPr>
+          <a:xfrm>
+            <a:off x="548640" y="274320"/>
+            <a:ext cx="11091672" cy="822960"/>
+          </a:xfrm>
+          <a:prstGeom prst="rect">
+            <a:avLst/>
+          </a:prstGeom>
+          <a:noFill/>
+          <a:ln/>
+        </p:spPr>
+        <p:txBody>
+          <a:bodyPr wrap="square" lIns="0" tIns="0" rIns="0" bIns="0" rtlCol="0" anchor="ctr"/>
+          <a:lstStyle/>
+          <a:p>
+            <a:pPr marL="0" indent="0" algn="r" rtl="1">
+              <a:buNone/>
+            </a:pPr>
+            <a:r>
+              <a:rPr lang="en-US" sz="3600" b="1" dirty="0" err="1">
+                <a:solidFill>
+                  <a:schemeClr val="tx2"/>
+                </a:solidFill>
+              </a:rPr>
+              <a:t>בונוס: הצב יודע גם לשחק!</a:t>
+            </a:r>
+            <a:endParaRPr lang="en-US" sz="3600" dirty="0"/>
+          </a:p>
+        </p:txBody>
+      </p:sp>
+      <p:sp>
+        <p:nvSpPr>
+          <p:cNvPr id="3" name="Rounded Rectangle 2"/>
+          <p:cNvSpPr/>
+          <p:nvPr/>
+        </p:nvSpPr>
+        <p:spPr>
+          <a:xfrm>
+            <a:off x="6336792" y="1325880"/>
+            <a:ext cx="5303520" cy="2971800"/>
+          </a:xfrm>
+          <a:prstGeom prst="roundRect">
+            <a:avLst>
+              <a:gd name="adj" fmla="val 8000"/>
+            </a:avLst>
+          </a:prstGeom>
+          <a:solidFill>
+            <a:srgbClr val="FFFFFF"/>
+          </a:solidFill>
+          <a:ln w="12700">
+            <a:solidFill>
+              <a:srgbClr val="D8E8DE"/>
+            </a:solidFill>
+          </a:ln>
+          <a:effectLst/>
+        </p:spPr>
+        <p:style>
+          <a:lnRef idx="1">
+            <a:schemeClr val="accent1"/>
+          </a:lnRef>
+          <a:fillRef idx="3">
+            <a:schemeClr val="accent1"/>
+          </a:fillRef>
+          <a:effectRef idx="2">
+            <a:schemeClr val="accent1"/>
+          </a:effectRef>
+          <a:fontRef idx="minor">
+            <a:schemeClr val="lt1"/>
+          </a:fontRef>
+        </p:style>
+        <p:txBody>
+          <a:bodyPr rtlCol="0" anchor="ctr"/>
+          <a:lstStyle/>
+          <a:p>
+            <a:endParaRPr/>
+          </a:p>
+        </p:txBody>
+      </p:sp>
+      <p:pic>
+        <p:nvPicPr>
+          <p:cNvPr id="4" name="Picture 3" descr="keysc.png"/>
+          <p:cNvPicPr>
+            <a:picLocks noChangeAspect="1"/>
+          </p:cNvPicPr>
+          <p:nvPr/>
+        </p:nvPicPr>
+        <p:blipFill>
+          <a:blip r:embed="rId3"/>
+          <a:stretch>
+            <a:fillRect/>
+          </a:stretch>
+        </p:blipFill>
+        <p:spPr>
+          <a:xfrm>
+            <a:off x="7296912" y="1463040"/>
+            <a:ext cx="3379154" cy="2697480"/>
+          </a:xfrm>
+          <a:prstGeom prst="rect">
+            <a:avLst/>
+          </a:prstGeom>
+        </p:spPr>
+      </p:pic>
+      <p:sp>
+        <p:nvSpPr>
+          <p:cNvPr id="5" name="TextBox 4"/>
+          <p:cNvSpPr txBox="1"/>
+          <p:nvPr/>
+        </p:nvSpPr>
+        <p:spPr>
+          <a:xfrm>
+            <a:off x="6336792" y="4434840"/>
+            <a:ext cx="5303520" cy="457200"/>
+          </a:xfrm>
+          <a:prstGeom prst="rect">
+            <a:avLst/>
+          </a:prstGeom>
+          <a:noFill/>
+        </p:spPr>
+        <p:txBody>
+          <a:bodyPr wrap="square" lIns="0" tIns="0" rIns="0" bIns="0" anchor="t">
+            <a:spAutoFit/>
+          </a:bodyPr>
+          <a:lstStyle/>
+          <a:p>
+            <a:pPr algn="r" rtl="1">
+              <a:spcAft>
+                <a:spcPts val="400"/>
+              </a:spcAft>
+            </a:pPr>
+            <a:r>
+              <a:rPr sz="2200" b="1">
+                <a:solidFill>
+                  <a:srgbClr val="2D9F5C"/>
+                </a:solidFill>
+                <a:latin typeface="Arial"/>
+              </a:rPr>
+              <a:t>ציור עם המקלדת</a:t>
+            </a:r>
+          </a:p>
+        </p:txBody>
+      </p:sp>
+      <p:sp>
+        <p:nvSpPr>
+          <p:cNvPr id="6" name="TextBox 5"/>
+          <p:cNvSpPr txBox="1"/>
+          <p:nvPr/>
+        </p:nvSpPr>
+        <p:spPr>
+          <a:xfrm>
+            <a:off x="6336792" y="4892040"/>
+            <a:ext cx="5303520" cy="914400"/>
+          </a:xfrm>
+          <a:prstGeom prst="rect">
+            <a:avLst/>
+          </a:prstGeom>
+          <a:noFill/>
+        </p:spPr>
+        <p:txBody>
+          <a:bodyPr wrap="square" lIns="0" tIns="0" rIns="0" bIns="0" anchor="t">
+            <a:spAutoFit/>
+          </a:bodyPr>
+          <a:lstStyle/>
+          <a:p>
+            <a:pPr algn="r" rtl="1">
+              <a:spcAft>
+                <a:spcPts val="400"/>
+              </a:spcAft>
+            </a:pPr>
+            <a:r>
+              <a:rPr sz="1600" b="0">
+                <a:solidFill>
+                  <a:srgbClr val="1B2B34"/>
+                </a:solidFill>
+                <a:latin typeface="Arial"/>
+              </a:rPr>
+              <a:t>חיצים - הזזת הצב</a:t>
+            </a:r>
+          </a:p>
+          <a:p>
+            <a:pPr algn="r" rtl="1">
+              <a:spcAft>
+                <a:spcPts val="400"/>
+              </a:spcAft>
+            </a:pPr>
+            <a:r>
+              <a:rPr sz="1600" b="0">
+                <a:solidFill>
+                  <a:srgbClr val="1B2B34"/>
+                </a:solidFill>
+                <a:latin typeface="Arial"/>
+              </a:rPr>
+              <a:t>רווח - הרמת / הורדת העט</a:t>
+            </a:r>
+          </a:p>
+          <a:p>
+            <a:pPr algn="r" rtl="1">
+              <a:spcAft>
+                <a:spcPts val="400"/>
+              </a:spcAft>
+            </a:pPr>
+            <a:r>
+              <a:rPr sz="1600" b="0">
+                <a:solidFill>
+                  <a:srgbClr val="1B2B34"/>
+                </a:solidFill>
+                <a:latin typeface="Arial"/>
+              </a:rPr>
+              <a:t>c - מחיקת הציור</a:t>
+            </a:r>
+          </a:p>
+        </p:txBody>
+      </p:sp>
+      <p:sp>
+        <p:nvSpPr>
+          <p:cNvPr id="7" name="Rounded Rectangle 6"/>
+          <p:cNvSpPr/>
+          <p:nvPr/>
+        </p:nvSpPr>
+        <p:spPr>
+          <a:xfrm>
+            <a:off x="9262872" y="5806440"/>
+            <a:ext cx="2377440" cy="457200"/>
+          </a:xfrm>
+          <a:prstGeom prst="roundRect">
+            <a:avLst>
+              <a:gd name="adj" fmla="val 50000"/>
+            </a:avLst>
+          </a:prstGeom>
+          <a:solidFill>
+            <a:srgbClr val="FF9F1C"/>
+          </a:solidFill>
+          <a:ln>
+            <a:noFill/>
+          </a:ln>
+          <a:effectLst/>
+        </p:spPr>
+        <p:style>
+          <a:lnRef idx="1">
+            <a:schemeClr val="accent1"/>
+          </a:lnRef>
+          <a:fillRef idx="3">
+            <a:schemeClr val="accent1"/>
+          </a:fillRef>
+          <a:effectRef idx="2">
+            <a:schemeClr val="accent1"/>
+          </a:effectRef>
+          <a:fontRef idx="minor">
+            <a:schemeClr val="lt1"/>
+          </a:fontRef>
+        </p:style>
+        <p:txBody>
+          <a:bodyPr lIns="0" rIns="0" rtlCol="0" anchor="ctr"/>
+          <a:lstStyle/>
+          <a:p>
+            <a:pPr algn="ctr"/>
+            <a:r>
+              <a:rPr sz="1600" b="1">
+                <a:solidFill>
+                  <a:srgbClr val="FFFFFF"/>
+                </a:solidFill>
+                <a:latin typeface="Arial"/>
+              </a:rPr>
+              <a:t>turtle7.py</a:t>
+            </a:r>
+          </a:p>
+        </p:txBody>
+      </p:sp>
+      <p:sp>
+        <p:nvSpPr>
+          <p:cNvPr id="8" name="Rounded Rectangle 7"/>
+          <p:cNvSpPr/>
+          <p:nvPr/>
+        </p:nvSpPr>
+        <p:spPr>
+          <a:xfrm>
+            <a:off x="548640" y="1325880"/>
+            <a:ext cx="5303520" cy="2971800"/>
+          </a:xfrm>
+          <a:prstGeom prst="roundRect">
+            <a:avLst>
+              <a:gd name="adj" fmla="val 8000"/>
+            </a:avLst>
+          </a:prstGeom>
+          <a:solidFill>
+            <a:srgbClr val="FFFFFF"/>
+          </a:solidFill>
+          <a:ln w="12700">
+            <a:solidFill>
+              <a:srgbClr val="D8E8DE"/>
+            </a:solidFill>
+          </a:ln>
+          <a:effectLst/>
+        </p:spPr>
+        <p:style>
+          <a:lnRef idx="1">
+            <a:schemeClr val="accent1"/>
+          </a:lnRef>
+          <a:fillRef idx="3">
+            <a:schemeClr val="accent1"/>
+          </a:fillRef>
+          <a:effectRef idx="2">
+            <a:schemeClr val="accent1"/>
+          </a:effectRef>
+          <a:fontRef idx="minor">
+            <a:schemeClr val="lt1"/>
+          </a:fontRef>
+        </p:style>
+        <p:txBody>
+          <a:bodyPr rtlCol="0" anchor="ctr"/>
+          <a:lstStyle/>
+          <a:p>
+            <a:endParaRPr/>
+          </a:p>
+        </p:txBody>
+      </p:sp>
+      <p:pic>
+        <p:nvPicPr>
+          <p:cNvPr id="9" name="Picture 8" descr="game_midc.png"/>
+          <p:cNvPicPr>
+            <a:picLocks noChangeAspect="1"/>
+          </p:cNvPicPr>
+          <p:nvPr/>
+        </p:nvPicPr>
+        <p:blipFill>
+          <a:blip r:embed="rId4"/>
+          <a:stretch>
+            <a:fillRect/>
+          </a:stretch>
+        </p:blipFill>
+        <p:spPr>
+          <a:xfrm>
+            <a:off x="1508760" y="1463040"/>
+            <a:ext cx="3379154" cy="2697480"/>
+          </a:xfrm>
+          <a:prstGeom prst="rect">
+            <a:avLst/>
+          </a:prstGeom>
+        </p:spPr>
+      </p:pic>
+      <p:sp>
+        <p:nvSpPr>
+          <p:cNvPr id="10" name="TextBox 9"/>
+          <p:cNvSpPr txBox="1"/>
+          <p:nvPr/>
+        </p:nvSpPr>
+        <p:spPr>
+          <a:xfrm>
+            <a:off x="548640" y="4434840"/>
+            <a:ext cx="5303520" cy="457200"/>
+          </a:xfrm>
+          <a:prstGeom prst="rect">
+            <a:avLst/>
+          </a:prstGeom>
+          <a:noFill/>
+        </p:spPr>
+        <p:txBody>
+          <a:bodyPr wrap="square" lIns="0" tIns="0" rIns="0" bIns="0" anchor="t">
+            <a:spAutoFit/>
+          </a:bodyPr>
+          <a:lstStyle/>
+          <a:p>
+            <a:pPr algn="r" rtl="1">
+              <a:spcAft>
+                <a:spcPts val="400"/>
+              </a:spcAft>
+            </a:pPr>
+            <a:r>
+              <a:rPr sz="2200" b="1">
+                <a:solidFill>
+                  <a:srgbClr val="EF476F"/>
+                </a:solidFill>
+                <a:latin typeface="Arial"/>
+              </a:rPr>
+              <a:t>משחק: תפסו את הצב!</a:t>
+            </a:r>
+          </a:p>
+        </p:txBody>
+      </p:sp>
+      <p:sp>
+        <p:nvSpPr>
+          <p:cNvPr id="11" name="TextBox 10"/>
+          <p:cNvSpPr txBox="1"/>
+          <p:nvPr/>
+        </p:nvSpPr>
+        <p:spPr>
+          <a:xfrm>
+            <a:off x="548640" y="4892040"/>
+            <a:ext cx="5303520" cy="914400"/>
+          </a:xfrm>
+          <a:prstGeom prst="rect">
+            <a:avLst/>
+          </a:prstGeom>
+          <a:noFill/>
+        </p:spPr>
+        <p:txBody>
+          <a:bodyPr wrap="square" lIns="0" tIns="0" rIns="0" bIns="0" anchor="t">
+            <a:spAutoFit/>
+          </a:bodyPr>
+          <a:lstStyle/>
+          <a:p>
+            <a:pPr algn="r" rtl="1">
+              <a:spcAft>
+                <a:spcPts val="400"/>
+              </a:spcAft>
+            </a:pPr>
+            <a:r>
+              <a:rPr sz="1600" b="0">
+                <a:solidFill>
+                  <a:srgbClr val="1B2B34"/>
+                </a:solidFill>
+                <a:latin typeface="Arial"/>
+              </a:rPr>
+              <a:t>לחיצה על הצב - נקודה</a:t>
+            </a:r>
+          </a:p>
+          <a:p>
+            <a:pPr algn="r" rtl="1">
+              <a:spcAft>
+                <a:spcPts val="400"/>
+              </a:spcAft>
+            </a:pPr>
+            <a:r>
+              <a:rPr sz="1600" b="0">
+                <a:solidFill>
+                  <a:srgbClr val="1B2B34"/>
+                </a:solidFill>
+                <a:latin typeface="Arial"/>
+              </a:rPr>
+              <a:t>יש לכם 30 שניות</a:t>
+            </a:r>
+          </a:p>
+          <a:p>
+            <a:pPr algn="r" rtl="1">
+              <a:spcAft>
+                <a:spcPts val="400"/>
+              </a:spcAft>
+            </a:pPr>
+            <a:r>
+              <a:rPr sz="1600" b="0">
+                <a:solidFill>
+                  <a:srgbClr val="1B2B34"/>
+                </a:solidFill>
+                <a:latin typeface="Arial"/>
+              </a:rPr>
+              <a:t>כמה תצליחו לצבור?</a:t>
+            </a:r>
+          </a:p>
+        </p:txBody>
+      </p:sp>
+      <p:sp>
+        <p:nvSpPr>
+          <p:cNvPr id="12" name="Rounded Rectangle 11"/>
+          <p:cNvSpPr/>
+          <p:nvPr/>
+        </p:nvSpPr>
+        <p:spPr>
+          <a:xfrm>
+            <a:off x="3474719" y="5806440"/>
+            <a:ext cx="2377440" cy="457200"/>
+          </a:xfrm>
+          <a:prstGeom prst="roundRect">
+            <a:avLst>
+              <a:gd name="adj" fmla="val 50000"/>
+            </a:avLst>
+          </a:prstGeom>
+          <a:solidFill>
+            <a:srgbClr val="FF9F1C"/>
+          </a:solidFill>
+          <a:ln>
+            <a:noFill/>
+          </a:ln>
+          <a:effectLst/>
+        </p:spPr>
+        <p:style>
+          <a:lnRef idx="1">
+            <a:schemeClr val="accent1"/>
+          </a:lnRef>
+          <a:fillRef idx="3">
+            <a:schemeClr val="accent1"/>
+          </a:fillRef>
+          <a:effectRef idx="2">
+            <a:schemeClr val="accent1"/>
+          </a:effectRef>
+          <a:fontRef idx="minor">
+            <a:schemeClr val="lt1"/>
+          </a:fontRef>
+        </p:style>
+        <p:txBody>
+          <a:bodyPr lIns="0" rIns="0" rtlCol="0" anchor="ctr"/>
+          <a:lstStyle/>
+          <a:p>
+            <a:pPr algn="ctr"/>
+            <a:r>
+              <a:rPr sz="1600" b="1">
+                <a:solidFill>
+                  <a:srgbClr val="FFFFFF"/>
+                </a:solidFill>
+                <a:latin typeface="Arial"/>
+              </a:rPr>
+              <a:t>turtle_game.py</a:t>
+            </a:r>
+          </a:p>
+        </p:txBody>
+      </p:sp>
+    </p:spTree>
+  </p:cSld>
+  <p:clrMapOvr>
+    <a:masterClrMapping/>
+  </p:clrMapOvr>
+</p:sld>
+</file>
+
+<file path=ppt/slides/slide16.xml><?xml version="1.0" encoding="utf-8"?>
 <p:sld xmlns:a="http://schemas.openxmlformats.org/drawingml/2006/main" xmlns:r="http://schemas.openxmlformats.org/officeDocument/2006/relationships" xmlns:p="http://schemas.openxmlformats.org/presentationml/2006/main">
   <p:cSld name="Slide 15">
     <p:spTree>
@@ -9375,551 +9915,6 @@
               <a:t>שמרו בשם turtle_hw_השם.py והעלו ל-Classroom</a:t>
             </a:r>
             <a:endParaRPr lang="he-IL" sz="1500" dirty="0"/>
-          </a:p>
-        </p:txBody>
-      </p:sp>
-    </p:spTree>
-  </p:cSld>
-  <p:clrMapOvr>
-    <a:masterClrMapping/>
-  </p:clrMapOvr>
-</p:sld>
-</file>
-
-<file path=ppt/slides/slide16.xml><?xml version="1.0" encoding="utf-8"?>
-<p:sld xmlns:a="http://schemas.openxmlformats.org/drawingml/2006/main" xmlns:p="http://schemas.openxmlformats.org/presentationml/2006/main" xmlns:r="http://schemas.openxmlformats.org/officeDocument/2006/relationships">
-  <p:cSld>
-    <p:spTree>
-      <p:nvGrpSpPr>
-        <p:cNvPr id="1" name=""/>
-        <p:cNvGrpSpPr/>
-        <p:nvPr/>
-      </p:nvGrpSpPr>
-      <p:grpSpPr/>
-      <p:sp>
-        <p:nvSpPr>
-          <p:cNvPr id="2" name="Text 0"/>
-          <p:cNvSpPr>
-            <a:spLocks noGrp="1"/>
-          </p:cNvSpPr>
-          <p:nvPr>
-            <p:ph type="title" idx="100" hasCustomPrompt="1"/>
-          </p:nvPr>
-        </p:nvSpPr>
-        <p:spPr>
-          <a:xfrm>
-            <a:off x="548640" y="274320"/>
-            <a:ext cx="11091672" cy="822960"/>
-          </a:xfrm>
-          <a:prstGeom prst="rect">
-            <a:avLst/>
-          </a:prstGeom>
-          <a:noFill/>
-          <a:ln/>
-        </p:spPr>
-        <p:txBody>
-          <a:bodyPr wrap="square" lIns="0" tIns="0" rIns="0" bIns="0" rtlCol="0" anchor="ctr"/>
-          <a:lstStyle/>
-          <a:p>
-            <a:pPr marL="0" indent="0" algn="r" rtl="1">
-              <a:buNone/>
-            </a:pPr>
-            <a:r>
-              <a:rPr lang="en-US" sz="3600" b="1" dirty="0" err="1">
-                <a:solidFill>
-                  <a:schemeClr val="tx2"/>
-                </a:solidFill>
-              </a:rPr>
-              <a:t>בונוס: הצב יודע גם לשחק!</a:t>
-            </a:r>
-            <a:endParaRPr lang="en-US" sz="3600" dirty="0"/>
-          </a:p>
-        </p:txBody>
-      </p:sp>
-      <p:sp>
-        <p:nvSpPr>
-          <p:cNvPr id="2" name="Title 1"/>
-          <p:cNvSpPr>
-            <a:spLocks noGrp="1"/>
-          </p:cNvSpPr>
-          <p:nvPr>
-            <p:ph type="title" idx="100"/>
-          </p:nvPr>
-        </p:nvSpPr>
-        <p:spPr/>
-        <p:txBody>
-          <a:bodyPr/>
-          <a:lstStyle/>
-          <a:p/>
-        </p:txBody>
-      </p:sp>
-      <p:sp>
-        <p:nvSpPr>
-          <p:cNvPr id="3" name="Rounded Rectangle 2"/>
-          <p:cNvSpPr/>
-          <p:nvPr/>
-        </p:nvSpPr>
-        <p:spPr>
-          <a:xfrm>
-            <a:off x="6336792" y="1325880"/>
-            <a:ext cx="5303520" cy="2971800"/>
-          </a:xfrm>
-          <a:prstGeom prst="roundRect">
-            <a:avLst>
-              <a:gd name="adj" fmla="val 8000"/>
-            </a:avLst>
-          </a:prstGeom>
-          <a:solidFill>
-            <a:srgbClr val="FFFFFF"/>
-          </a:solidFill>
-          <a:ln w="12700">
-            <a:solidFill>
-              <a:srgbClr val="D8E8DE"/>
-            </a:solidFill>
-          </a:ln>
-          <a:effectLst/>
-        </p:spPr>
-        <p:style>
-          <a:lnRef idx="1">
-            <a:schemeClr val="accent1"/>
-          </a:lnRef>
-          <a:fillRef idx="3">
-            <a:schemeClr val="accent1"/>
-          </a:fillRef>
-          <a:effectRef idx="2">
-            <a:schemeClr val="accent1"/>
-          </a:effectRef>
-          <a:fontRef idx="minor">
-            <a:schemeClr val="lt1"/>
-          </a:fontRef>
-        </p:style>
-        <p:txBody>
-          <a:bodyPr rtlCol="0" anchor="ctr"/>
-          <a:lstStyle/>
-          <a:p/>
-        </p:txBody>
-      </p:sp>
-      <p:pic>
-        <p:nvPicPr>
-          <p:cNvPr id="4" name="Picture 3" descr="keysc.png"/>
-          <p:cNvPicPr>
-            <a:picLocks noChangeAspect="1"/>
-          </p:cNvPicPr>
-          <p:nvPr/>
-        </p:nvPicPr>
-        <p:blipFill>
-          <a:blip r:embed="rId2"/>
-          <a:stretch>
-            <a:fillRect/>
-          </a:stretch>
-        </p:blipFill>
-        <p:spPr>
-          <a:xfrm>
-            <a:off x="7296912" y="1463040"/>
-            <a:ext cx="3379154" cy="2697480"/>
-          </a:xfrm>
-          <a:prstGeom prst="rect">
-            <a:avLst/>
-          </a:prstGeom>
-        </p:spPr>
-      </p:pic>
-      <p:sp>
-        <p:nvSpPr>
-          <p:cNvPr id="5" name="TextBox 4"/>
-          <p:cNvSpPr txBox="1"/>
-          <p:nvPr/>
-        </p:nvSpPr>
-        <p:spPr>
-          <a:xfrm>
-            <a:off x="6336792" y="4434840"/>
-            <a:ext cx="5303520" cy="457200"/>
-          </a:xfrm>
-          <a:prstGeom prst="rect">
-            <a:avLst/>
-          </a:prstGeom>
-          <a:noFill/>
-        </p:spPr>
-        <p:txBody>
-          <a:bodyPr wrap="square" anchor="t" lIns="0" rIns="0" tIns="0" bIns="0">
-            <a:spAutoFit/>
-          </a:bodyPr>
-          <a:lstStyle/>
-          <a:p>
-            <a:pPr algn="r" rtl="1">
-              <a:spcAft>
-                <a:spcPts val="400"/>
-              </a:spcAft>
-            </a:pPr>
-            <a:r>
-              <a:rPr sz="2200" b="1">
-                <a:solidFill>
-                  <a:srgbClr val="2D9F5C"/>
-                </a:solidFill>
-                <a:latin typeface="Arial"/>
-              </a:rPr>
-              <a:t>ציור עם המקלדת</a:t>
-            </a:r>
-          </a:p>
-        </p:txBody>
-      </p:sp>
-      <p:sp>
-        <p:nvSpPr>
-          <p:cNvPr id="6" name="TextBox 5"/>
-          <p:cNvSpPr txBox="1"/>
-          <p:nvPr/>
-        </p:nvSpPr>
-        <p:spPr>
-          <a:xfrm>
-            <a:off x="6336792" y="4892040"/>
-            <a:ext cx="5303520" cy="914400"/>
-          </a:xfrm>
-          <a:prstGeom prst="rect">
-            <a:avLst/>
-          </a:prstGeom>
-          <a:noFill/>
-        </p:spPr>
-        <p:txBody>
-          <a:bodyPr wrap="square" anchor="t" lIns="0" rIns="0" tIns="0" bIns="0">
-            <a:spAutoFit/>
-          </a:bodyPr>
-          <a:lstStyle/>
-          <a:p>
-            <a:pPr algn="r" rtl="1">
-              <a:spcAft>
-                <a:spcPts val="400"/>
-              </a:spcAft>
-            </a:pPr>
-            <a:r>
-              <a:rPr sz="1600" b="0">
-                <a:solidFill>
-                  <a:srgbClr val="1B2B34"/>
-                </a:solidFill>
-                <a:latin typeface="Arial"/>
-              </a:rPr>
-              <a:t>חיצים - הזזת הצב</a:t>
-            </a:r>
-          </a:p>
-          <a:p>
-            <a:pPr algn="r" rtl="1">
-              <a:spcAft>
-                <a:spcPts val="400"/>
-              </a:spcAft>
-            </a:pPr>
-            <a:r>
-              <a:rPr sz="1600" b="0">
-                <a:solidFill>
-                  <a:srgbClr val="1B2B34"/>
-                </a:solidFill>
-                <a:latin typeface="Arial"/>
-              </a:rPr>
-              <a:t>רווח - הרמת / הורדת העט</a:t>
-            </a:r>
-          </a:p>
-          <a:p>
-            <a:pPr algn="r" rtl="1">
-              <a:spcAft>
-                <a:spcPts val="400"/>
-              </a:spcAft>
-            </a:pPr>
-            <a:r>
-              <a:rPr sz="1600" b="0">
-                <a:solidFill>
-                  <a:srgbClr val="1B2B34"/>
-                </a:solidFill>
-                <a:latin typeface="Arial"/>
-              </a:rPr>
-              <a:t>c - מחיקת הציור</a:t>
-            </a:r>
-          </a:p>
-        </p:txBody>
-      </p:sp>
-      <p:sp>
-        <p:nvSpPr>
-          <p:cNvPr id="7" name="Rounded Rectangle 6"/>
-          <p:cNvSpPr/>
-          <p:nvPr/>
-        </p:nvSpPr>
-        <p:spPr>
-          <a:xfrm>
-            <a:off x="9262872" y="5806440"/>
-            <a:ext cx="2377440" cy="457200"/>
-          </a:xfrm>
-          <a:prstGeom prst="roundRect">
-            <a:avLst>
-              <a:gd name="adj" fmla="val 50000"/>
-            </a:avLst>
-          </a:prstGeom>
-          <a:solidFill>
-            <a:srgbClr val="FF9F1C"/>
-          </a:solidFill>
-          <a:ln>
-            <a:noFill/>
-          </a:ln>
-          <a:effectLst/>
-        </p:spPr>
-        <p:style>
-          <a:lnRef idx="1">
-            <a:schemeClr val="accent1"/>
-          </a:lnRef>
-          <a:fillRef idx="3">
-            <a:schemeClr val="accent1"/>
-          </a:fillRef>
-          <a:effectRef idx="2">
-            <a:schemeClr val="accent1"/>
-          </a:effectRef>
-          <a:fontRef idx="minor">
-            <a:schemeClr val="lt1"/>
-          </a:fontRef>
-        </p:style>
-        <p:txBody>
-          <a:bodyPr rtlCol="0" anchor="ctr" lIns="0" rIns="0"/>
-          <a:lstStyle/>
-          <a:p>
-            <a:pPr algn="ctr"/>
-            <a:r>
-              <a:rPr sz="1600" b="1">
-                <a:solidFill>
-                  <a:srgbClr val="FFFFFF"/>
-                </a:solidFill>
-                <a:latin typeface="Arial"/>
-              </a:rPr>
-              <a:t>turtle7.py</a:t>
-            </a:r>
-          </a:p>
-        </p:txBody>
-      </p:sp>
-      <p:sp>
-        <p:nvSpPr>
-          <p:cNvPr id="8" name="Rounded Rectangle 7"/>
-          <p:cNvSpPr/>
-          <p:nvPr/>
-        </p:nvSpPr>
-        <p:spPr>
-          <a:xfrm>
-            <a:off x="548640" y="1325880"/>
-            <a:ext cx="5303520" cy="2971800"/>
-          </a:xfrm>
-          <a:prstGeom prst="roundRect">
-            <a:avLst>
-              <a:gd name="adj" fmla="val 8000"/>
-            </a:avLst>
-          </a:prstGeom>
-          <a:solidFill>
-            <a:srgbClr val="FFFFFF"/>
-          </a:solidFill>
-          <a:ln w="12700">
-            <a:solidFill>
-              <a:srgbClr val="D8E8DE"/>
-            </a:solidFill>
-          </a:ln>
-          <a:effectLst/>
-        </p:spPr>
-        <p:style>
-          <a:lnRef idx="1">
-            <a:schemeClr val="accent1"/>
-          </a:lnRef>
-          <a:fillRef idx="3">
-            <a:schemeClr val="accent1"/>
-          </a:fillRef>
-          <a:effectRef idx="2">
-            <a:schemeClr val="accent1"/>
-          </a:effectRef>
-          <a:fontRef idx="minor">
-            <a:schemeClr val="lt1"/>
-          </a:fontRef>
-        </p:style>
-        <p:txBody>
-          <a:bodyPr rtlCol="0" anchor="ctr"/>
-          <a:lstStyle/>
-          <a:p/>
-        </p:txBody>
-      </p:sp>
-      <p:pic>
-        <p:nvPicPr>
-          <p:cNvPr id="9" name="Picture 8" descr="game_midc.png"/>
-          <p:cNvPicPr>
-            <a:picLocks noChangeAspect="1"/>
-          </p:cNvPicPr>
-          <p:nvPr/>
-        </p:nvPicPr>
-        <p:blipFill>
-          <a:blip r:embed="rId3"/>
-          <a:stretch>
-            <a:fillRect/>
-          </a:stretch>
-        </p:blipFill>
-        <p:spPr>
-          <a:xfrm>
-            <a:off x="1508760" y="1463040"/>
-            <a:ext cx="3379154" cy="2697480"/>
-          </a:xfrm>
-          <a:prstGeom prst="rect">
-            <a:avLst/>
-          </a:prstGeom>
-        </p:spPr>
-      </p:pic>
-      <p:sp>
-        <p:nvSpPr>
-          <p:cNvPr id="10" name="TextBox 9"/>
-          <p:cNvSpPr txBox="1"/>
-          <p:nvPr/>
-        </p:nvSpPr>
-        <p:spPr>
-          <a:xfrm>
-            <a:off x="548640" y="4434840"/>
-            <a:ext cx="5303520" cy="457200"/>
-          </a:xfrm>
-          <a:prstGeom prst="rect">
-            <a:avLst/>
-          </a:prstGeom>
-          <a:noFill/>
-        </p:spPr>
-        <p:txBody>
-          <a:bodyPr wrap="square" anchor="t" lIns="0" rIns="0" tIns="0" bIns="0">
-            <a:spAutoFit/>
-          </a:bodyPr>
-          <a:lstStyle/>
-          <a:p>
-            <a:pPr algn="r" rtl="1">
-              <a:spcAft>
-                <a:spcPts val="400"/>
-              </a:spcAft>
-            </a:pPr>
-            <a:r>
-              <a:rPr sz="2200" b="1">
-                <a:solidFill>
-                  <a:srgbClr val="EF476F"/>
-                </a:solidFill>
-                <a:latin typeface="Arial"/>
-              </a:rPr>
-              <a:t>משחק: תפסו את הצב!</a:t>
-            </a:r>
-          </a:p>
-        </p:txBody>
-      </p:sp>
-      <p:sp>
-        <p:nvSpPr>
-          <p:cNvPr id="11" name="TextBox 10"/>
-          <p:cNvSpPr txBox="1"/>
-          <p:nvPr/>
-        </p:nvSpPr>
-        <p:spPr>
-          <a:xfrm>
-            <a:off x="548640" y="4892040"/>
-            <a:ext cx="5303520" cy="914400"/>
-          </a:xfrm>
-          <a:prstGeom prst="rect">
-            <a:avLst/>
-          </a:prstGeom>
-          <a:noFill/>
-        </p:spPr>
-        <p:txBody>
-          <a:bodyPr wrap="square" anchor="t" lIns="0" rIns="0" tIns="0" bIns="0">
-            <a:spAutoFit/>
-          </a:bodyPr>
-          <a:lstStyle/>
-          <a:p>
-            <a:pPr algn="r" rtl="1">
-              <a:spcAft>
-                <a:spcPts val="400"/>
-              </a:spcAft>
-            </a:pPr>
-            <a:r>
-              <a:rPr sz="1600" b="0">
-                <a:solidFill>
-                  <a:srgbClr val="1B2B34"/>
-                </a:solidFill>
-                <a:latin typeface="Arial"/>
-              </a:rPr>
-              <a:t>לחיצה על הצב - נקודה</a:t>
-            </a:r>
-          </a:p>
-          <a:p>
-            <a:pPr algn="r" rtl="1">
-              <a:spcAft>
-                <a:spcPts val="400"/>
-              </a:spcAft>
-            </a:pPr>
-            <a:r>
-              <a:rPr sz="1600" b="0">
-                <a:solidFill>
-                  <a:srgbClr val="1B2B34"/>
-                </a:solidFill>
-                <a:latin typeface="Arial"/>
-              </a:rPr>
-              <a:t>יש לכם 30 שניות</a:t>
-            </a:r>
-          </a:p>
-          <a:p>
-            <a:pPr algn="r" rtl="1">
-              <a:spcAft>
-                <a:spcPts val="400"/>
-              </a:spcAft>
-            </a:pPr>
-            <a:r>
-              <a:rPr sz="1600" b="0">
-                <a:solidFill>
-                  <a:srgbClr val="1B2B34"/>
-                </a:solidFill>
-                <a:latin typeface="Arial"/>
-              </a:rPr>
-              <a:t>כמה תצליחו לצבור?</a:t>
-            </a:r>
-          </a:p>
-        </p:txBody>
-      </p:sp>
-      <p:sp>
-        <p:nvSpPr>
-          <p:cNvPr id="12" name="Rounded Rectangle 11"/>
-          <p:cNvSpPr/>
-          <p:nvPr/>
-        </p:nvSpPr>
-        <p:spPr>
-          <a:xfrm>
-            <a:off x="3474719" y="5806440"/>
-            <a:ext cx="2377440" cy="457200"/>
-          </a:xfrm>
-          <a:prstGeom prst="roundRect">
-            <a:avLst>
-              <a:gd name="adj" fmla="val 50000"/>
-            </a:avLst>
-          </a:prstGeom>
-          <a:solidFill>
-            <a:srgbClr val="FF9F1C"/>
-          </a:solidFill>
-          <a:ln>
-            <a:noFill/>
-          </a:ln>
-          <a:effectLst/>
-        </p:spPr>
-        <p:style>
-          <a:lnRef idx="1">
-            <a:schemeClr val="accent1"/>
-          </a:lnRef>
-          <a:fillRef idx="3">
-            <a:schemeClr val="accent1"/>
-          </a:fillRef>
-          <a:effectRef idx="2">
-            <a:schemeClr val="accent1"/>
-          </a:effectRef>
-          <a:fontRef idx="minor">
-            <a:schemeClr val="lt1"/>
-          </a:fontRef>
-        </p:style>
-        <p:txBody>
-          <a:bodyPr rtlCol="0" anchor="ctr" lIns="0" rIns="0"/>
-          <a:lstStyle/>
-          <a:p>
-            <a:pPr algn="ctr"/>
-            <a:r>
-              <a:rPr sz="1600" b="1">
-                <a:solidFill>
-                  <a:srgbClr val="FFFFFF"/>
-                </a:solidFill>
-                <a:latin typeface="Arial"/>
-              </a:rPr>
-              <a:t>turtle_game.py</a:t>
-            </a:r>
           </a:p>
         </p:txBody>
       </p:sp>
@@ -11038,7 +11033,7 @@
           </a:prstGeom>
           <a:extLst>
             <a:ext uri="{C572A759-6A51-4108-AA02-DFA0A04FC94B}">
-              <ma14:wrappingTextBoxFlag xmlns:ma14="http://schemas.microsoft.com/office/mac/drawingml/2011/main" xmlns="" val="0"/>
+              <ma14:wrappingTextBoxFlag xmlns="" xmlns:ma14="http://schemas.microsoft.com/office/mac/drawingml/2011/main" val="0"/>
             </a:ext>
           </a:extLst>
         </p:spPr>
@@ -12341,7 +12336,7 @@
           </a:prstGeom>
           <a:extLst>
             <a:ext uri="{C572A759-6A51-4108-AA02-DFA0A04FC94B}">
-              <ma14:wrappingTextBoxFlag xmlns:ma14="http://schemas.microsoft.com/office/mac/drawingml/2011/main" xmlns="" val="0"/>
+              <ma14:wrappingTextBoxFlag xmlns="" xmlns:ma14="http://schemas.microsoft.com/office/mac/drawingml/2011/main" val="0"/>
             </a:ext>
           </a:extLst>
         </p:spPr>
@@ -13025,7 +13020,7 @@
           </a:prstGeom>
           <a:extLst>
             <a:ext uri="{C572A759-6A51-4108-AA02-DFA0A04FC94B}">
-              <ma14:wrappingTextBoxFlag xmlns:ma14="http://schemas.microsoft.com/office/mac/drawingml/2011/main" xmlns="" val="0"/>
+              <ma14:wrappingTextBoxFlag xmlns="" xmlns:ma14="http://schemas.microsoft.com/office/mac/drawingml/2011/main" val="0"/>
             </a:ext>
           </a:extLst>
         </p:spPr>
@@ -13799,7 +13794,7 @@
           </a:prstGeom>
           <a:extLst>
             <a:ext uri="{C572A759-6A51-4108-AA02-DFA0A04FC94B}">
-              <ma14:wrappingTextBoxFlag xmlns:ma14="http://schemas.microsoft.com/office/mac/drawingml/2011/main" xmlns="" val="0"/>
+              <ma14:wrappingTextBoxFlag xmlns="" xmlns:ma14="http://schemas.microsoft.com/office/mac/drawingml/2011/main" val="0"/>
             </a:ext>
           </a:extLst>
         </p:spPr>
@@ -13917,7 +13912,10 @@
         </p:spPr>
         <p:txBody>
           <a:bodyPr/>
-          <a:p/>
+          <a:lstStyle/>
+          <a:p>
+            <a:endParaRPr/>
+          </a:p>
         </p:txBody>
       </p:sp>
       <p:sp>
@@ -14020,7 +14018,10 @@
         </p:spPr>
         <p:txBody>
           <a:bodyPr/>
-          <a:p/>
+          <a:lstStyle/>
+          <a:p>
+            <a:endParaRPr/>
+          </a:p>
         </p:txBody>
       </p:sp>
       <p:sp>
@@ -14137,7 +14138,10 @@
         </p:spPr>
         <p:txBody>
           <a:bodyPr/>
-          <a:p/>
+          <a:lstStyle/>
+          <a:p>
+            <a:endParaRPr/>
+          </a:p>
         </p:txBody>
       </p:sp>
       <p:sp>
@@ -14240,7 +14244,10 @@
         </p:spPr>
         <p:txBody>
           <a:bodyPr/>
-          <a:p/>
+          <a:lstStyle/>
+          <a:p>
+            <a:endParaRPr/>
+          </a:p>
         </p:txBody>
       </p:sp>
       <p:sp>
@@ -14343,7 +14350,10 @@
         </p:spPr>
         <p:txBody>
           <a:bodyPr/>
-          <a:p/>
+          <a:lstStyle/>
+          <a:p>
+            <a:endParaRPr/>
+          </a:p>
         </p:txBody>
       </p:sp>
       <p:sp>
@@ -14372,7 +14382,10 @@
         </p:spPr>
         <p:txBody>
           <a:bodyPr/>
-          <a:p/>
+          <a:lstStyle/>
+          <a:p>
+            <a:endParaRPr/>
+          </a:p>
         </p:txBody>
       </p:sp>
       <p:pic>
@@ -14506,7 +14519,10 @@
         </p:spPr>
         <p:txBody>
           <a:bodyPr/>
-          <a:p/>
+          <a:lstStyle/>
+          <a:p>
+            <a:endParaRPr/>
+          </a:p>
         </p:txBody>
       </p:sp>
       <p:sp>
@@ -14866,7 +14882,7 @@
           </a:prstGeom>
           <a:extLst>
             <a:ext uri="{C572A759-6A51-4108-AA02-DFA0A04FC94B}">
-              <ma14:wrappingTextBoxFlag xmlns:ma14="http://schemas.microsoft.com/office/mac/drawingml/2011/main" xmlns="" val="0"/>
+              <ma14:wrappingTextBoxFlag xmlns="" xmlns:ma14="http://schemas.microsoft.com/office/mac/drawingml/2011/main" val="0"/>
             </a:ext>
           </a:extLst>
         </p:spPr>
@@ -16124,7 +16140,7 @@
           </a:prstGeom>
           <a:extLst>
             <a:ext uri="{C572A759-6A51-4108-AA02-DFA0A04FC94B}">
-              <ma14:wrappingTextBoxFlag xmlns:ma14="http://schemas.microsoft.com/office/mac/drawingml/2011/main" xmlns="" val="0"/>
+              <ma14:wrappingTextBoxFlag xmlns="" xmlns:ma14="http://schemas.microsoft.com/office/mac/drawingml/2011/main" val="0"/>
             </a:ext>
           </a:extLst>
         </p:spPr>
@@ -16952,7 +16968,7 @@
           </a:prstGeom>
           <a:extLst>
             <a:ext uri="{C572A759-6A51-4108-AA02-DFA0A04FC94B}">
-              <ma14:wrappingTextBoxFlag xmlns:ma14="http://schemas.microsoft.com/office/mac/drawingml/2011/main" xmlns="" val="0"/>
+              <ma14:wrappingTextBoxFlag xmlns="" xmlns:ma14="http://schemas.microsoft.com/office/mac/drawingml/2011/main" val="0"/>
             </a:ext>
           </a:extLst>
         </p:spPr>
@@ -18090,7 +18106,7 @@
           </a:prstGeom>
           <a:extLst>
             <a:ext uri="{C572A759-6A51-4108-AA02-DFA0A04FC94B}">
-              <ma14:wrappingTextBoxFlag xmlns:ma14="http://schemas.microsoft.com/office/mac/drawingml/2011/main" xmlns="" val="0"/>
+              <ma14:wrappingTextBoxFlag xmlns="" xmlns:ma14="http://schemas.microsoft.com/office/mac/drawingml/2011/main" val="0"/>
             </a:ext>
           </a:extLst>
         </p:spPr>

--- a/lesson2 turtle/שיעור הצב המצייר.pptx
+++ b/lesson2 turtle/שיעור הצב המצייר.pptx
@@ -1830,7 +1830,7 @@
           </a:prstGeom>
           <a:extLst>
             <a:ext uri="{C572A759-6A51-4108-AA02-DFA0A04FC94B}">
-              <ma14:wrappingTextBoxFlag xmlns="" xmlns:ma14="http://schemas.microsoft.com/office/mac/drawingml/2011/main" val="0"/>
+              <ma14:wrappingTextBoxFlag xmlns:ma14="http://schemas.microsoft.com/office/mac/drawingml/2011/main" xmlns="" val="0"/>
             </a:ext>
           </a:extLst>
         </p:spPr>
@@ -1905,7 +1905,7 @@
           </a:prstGeom>
           <a:extLst>
             <a:ext uri="{C572A759-6A51-4108-AA02-DFA0A04FC94B}">
-              <ma14:wrappingTextBoxFlag xmlns="" xmlns:ma14="http://schemas.microsoft.com/office/mac/drawingml/2011/main" val="0"/>
+              <ma14:wrappingTextBoxFlag xmlns:ma14="http://schemas.microsoft.com/office/mac/drawingml/2011/main" xmlns="" val="0"/>
             </a:ext>
           </a:extLst>
         </p:spPr>
@@ -4251,7 +4251,7 @@
           </a:prstGeom>
           <a:extLst>
             <a:ext uri="{C572A759-6A51-4108-AA02-DFA0A04FC94B}">
-              <ma14:wrappingTextBoxFlag xmlns="" xmlns:ma14="http://schemas.microsoft.com/office/mac/drawingml/2011/main" val="0"/>
+              <ma14:wrappingTextBoxFlag xmlns:ma14="http://schemas.microsoft.com/office/mac/drawingml/2011/main" xmlns="" val="0"/>
             </a:ext>
           </a:extLst>
         </p:spPr>
@@ -5124,7 +5124,7 @@
           </a:prstGeom>
           <a:extLst>
             <a:ext uri="{C572A759-6A51-4108-AA02-DFA0A04FC94B}">
-              <ma14:wrappingTextBoxFlag xmlns="" xmlns:ma14="http://schemas.microsoft.com/office/mac/drawingml/2011/main" val="0"/>
+              <ma14:wrappingTextBoxFlag xmlns:ma14="http://schemas.microsoft.com/office/mac/drawingml/2011/main" xmlns="" val="0"/>
             </a:ext>
           </a:extLst>
         </p:spPr>
@@ -5305,7 +5305,7 @@
               <a:buNone/>
             </a:pPr>
             <a:r>
-              <a:rPr lang="en-US" sz="1700" dirty="0">
+              <a:rPr lang="en-US" sz="2400" b="1" dirty="0">
                 <a:solidFill>
                   <a:srgbClr val="FF9F1C"/>
                 </a:solidFill>
@@ -5316,7 +5316,7 @@
               <a:t>import</a:t>
             </a:r>
             <a:r>
-              <a:rPr lang="en-US" sz="1700" dirty="0">
+              <a:rPr lang="en-US" sz="2400" b="1" dirty="0">
                 <a:solidFill>
                   <a:srgbClr val="E0E0E0"/>
                 </a:solidFill>
@@ -5326,14 +5326,14 @@
               </a:rPr>
               <a:t> random</a:t>
             </a:r>
-            <a:endParaRPr lang="en-US" sz="1700" dirty="0"/>
+            <a:endParaRPr lang="en-US" sz="2400" b="1" dirty="0"/>
           </a:p>
           <a:p>
             <a:pPr marL="0" indent="0" algn="l">
               <a:buNone/>
             </a:pPr>
             <a:r>
-              <a:rPr lang="en-US" sz="1700" dirty="0">
+              <a:rPr lang="en-US" sz="2400" b="1" dirty="0">
                 <a:solidFill>
                   <a:srgbClr val="7FDBFF"/>
                 </a:solidFill>
@@ -5344,7 +5344,7 @@
               <a:t>sides</a:t>
             </a:r>
             <a:r>
-              <a:rPr lang="en-US" sz="1700" dirty="0">
+              <a:rPr lang="en-US" sz="2400" b="1" dirty="0">
                 <a:solidFill>
                   <a:srgbClr val="E0E0E0"/>
                 </a:solidFill>
@@ -5355,7 +5355,7 @@
               <a:t> = </a:t>
             </a:r>
             <a:r>
-              <a:rPr lang="en-US" sz="1700" dirty="0">
+              <a:rPr lang="en-US" sz="2400" b="1" dirty="0">
                 <a:solidFill>
                   <a:srgbClr val="FFD166"/>
                 </a:solidFill>
@@ -5365,14 +5365,14 @@
               </a:rPr>
               <a:t>5</a:t>
             </a:r>
-            <a:endParaRPr lang="en-US" sz="1700" dirty="0"/>
+            <a:endParaRPr lang="en-US" sz="2400" b="1" dirty="0"/>
           </a:p>
           <a:p>
             <a:pPr marL="0" indent="0" algn="l">
               <a:buNone/>
             </a:pPr>
             <a:r>
-              <a:rPr lang="en-US" sz="1700" dirty="0">
+              <a:rPr lang="en-US" sz="2400" b="1" dirty="0">
                 <a:solidFill>
                   <a:srgbClr val="FF9F1C"/>
                 </a:solidFill>
@@ -5383,7 +5383,7 @@
               <a:t>if</a:t>
             </a:r>
             <a:r>
-              <a:rPr lang="en-US" sz="1700" dirty="0">
+              <a:rPr lang="en-US" sz="2400" b="1" dirty="0">
                 <a:solidFill>
                   <a:srgbClr val="E0E0E0"/>
                 </a:solidFill>
@@ -5394,7 +5394,7 @@
               <a:t> sides == </a:t>
             </a:r>
             <a:r>
-              <a:rPr lang="en-US" sz="1700" dirty="0">
+              <a:rPr lang="en-US" sz="2400" b="1" dirty="0">
                 <a:solidFill>
                   <a:srgbClr val="FFD166"/>
                 </a:solidFill>
@@ -5405,7 +5405,7 @@
               <a:t>3</a:t>
             </a:r>
             <a:r>
-              <a:rPr lang="en-US" sz="1700" dirty="0">
+              <a:rPr lang="en-US" sz="2400" b="1" dirty="0">
                 <a:solidFill>
                   <a:srgbClr val="E0E0E0"/>
                 </a:solidFill>
@@ -5415,14 +5415,14 @@
               </a:rPr>
               <a:t>:</a:t>
             </a:r>
-            <a:endParaRPr lang="en-US" sz="1700" dirty="0"/>
+            <a:endParaRPr lang="en-US" sz="2400" b="1" dirty="0"/>
           </a:p>
           <a:p>
             <a:pPr marL="0" indent="0" algn="l">
               <a:buNone/>
             </a:pPr>
             <a:r>
-              <a:rPr lang="en-US" sz="1700" dirty="0">
+              <a:rPr lang="en-US" sz="2400" b="1" dirty="0">
                 <a:solidFill>
                   <a:srgbClr val="E0E0E0"/>
                 </a:solidFill>
@@ -5433,7 +5433,7 @@
               <a:t>    t.</a:t>
             </a:r>
             <a:r>
-              <a:rPr lang="en-US" sz="1700" dirty="0">
+              <a:rPr lang="en-US" sz="2400" b="1" dirty="0">
                 <a:solidFill>
                   <a:srgbClr val="7FDBFF"/>
                 </a:solidFill>
@@ -5444,7 +5444,7 @@
               <a:t>color</a:t>
             </a:r>
             <a:r>
-              <a:rPr lang="en-US" sz="1700" dirty="0">
+              <a:rPr lang="en-US" sz="2400" b="1" dirty="0">
                 <a:solidFill>
                   <a:srgbClr val="E0E0E0"/>
                 </a:solidFill>
@@ -5455,7 +5455,7 @@
               <a:t>(</a:t>
             </a:r>
             <a:r>
-              <a:rPr lang="en-US" sz="1700" dirty="0">
+              <a:rPr lang="en-US" sz="2400" b="1" dirty="0">
                 <a:solidFill>
                   <a:srgbClr val="95E06C"/>
                 </a:solidFill>
@@ -5466,7 +5466,7 @@
               <a:t>"red"</a:t>
             </a:r>
             <a:r>
-              <a:rPr lang="en-US" sz="1700" dirty="0">
+              <a:rPr lang="en-US" sz="2400" b="1" dirty="0">
                 <a:solidFill>
                   <a:srgbClr val="E0E0E0"/>
                 </a:solidFill>
@@ -5476,14 +5476,14 @@
               </a:rPr>
               <a:t>)</a:t>
             </a:r>
-            <a:endParaRPr lang="en-US" sz="1700" dirty="0"/>
+            <a:endParaRPr lang="en-US" sz="2400" b="1" dirty="0"/>
           </a:p>
           <a:p>
             <a:pPr marL="0" indent="0" algn="l">
               <a:buNone/>
             </a:pPr>
             <a:r>
-              <a:rPr lang="en-US" sz="1700" dirty="0">
+              <a:rPr lang="en-US" sz="2400" b="1" dirty="0">
                 <a:solidFill>
                   <a:srgbClr val="FF9F1C"/>
                 </a:solidFill>
@@ -5494,7 +5494,7 @@
               <a:t>else</a:t>
             </a:r>
             <a:r>
-              <a:rPr lang="en-US" sz="1700" dirty="0">
+              <a:rPr lang="en-US" sz="2400" b="1" dirty="0">
                 <a:solidFill>
                   <a:srgbClr val="E0E0E0"/>
                 </a:solidFill>
@@ -5504,14 +5504,14 @@
               </a:rPr>
               <a:t>:</a:t>
             </a:r>
-            <a:endParaRPr lang="en-US" sz="1700" dirty="0"/>
+            <a:endParaRPr lang="en-US" sz="2400" b="1" dirty="0"/>
           </a:p>
           <a:p>
             <a:pPr marL="0" indent="0" algn="l">
               <a:buNone/>
             </a:pPr>
             <a:r>
-              <a:rPr lang="en-US" sz="1700" dirty="0">
+              <a:rPr lang="en-US" sz="2400" b="1" dirty="0">
                 <a:solidFill>
                   <a:srgbClr val="E0E0E0"/>
                 </a:solidFill>
@@ -5522,7 +5522,7 @@
               <a:t>    t.</a:t>
             </a:r>
             <a:r>
-              <a:rPr lang="en-US" sz="1700" dirty="0">
+              <a:rPr lang="en-US" sz="2400" b="1" dirty="0">
                 <a:solidFill>
                   <a:srgbClr val="7FDBFF"/>
                 </a:solidFill>
@@ -5533,7 +5533,7 @@
               <a:t>color</a:t>
             </a:r>
             <a:r>
-              <a:rPr lang="en-US" sz="1700" dirty="0">
+              <a:rPr lang="en-US" sz="2400" b="1" dirty="0">
                 <a:solidFill>
                   <a:srgbClr val="E0E0E0"/>
                 </a:solidFill>
@@ -5544,7 +5544,7 @@
               <a:t>(</a:t>
             </a:r>
             <a:r>
-              <a:rPr lang="en-US" sz="1700" dirty="0">
+              <a:rPr lang="en-US" sz="2400" b="1" dirty="0">
                 <a:solidFill>
                   <a:srgbClr val="95E06C"/>
                 </a:solidFill>
@@ -5555,7 +5555,7 @@
               <a:t>"cyan"</a:t>
             </a:r>
             <a:r>
-              <a:rPr lang="en-US" sz="1700" dirty="0">
+              <a:rPr lang="en-US" sz="2400" b="1" dirty="0">
                 <a:solidFill>
                   <a:srgbClr val="E0E0E0"/>
                 </a:solidFill>
@@ -5565,14 +5565,14 @@
               </a:rPr>
               <a:t>)</a:t>
             </a:r>
-            <a:endParaRPr lang="en-US" sz="1700" dirty="0"/>
+            <a:endParaRPr lang="en-US" sz="2400" b="1" dirty="0"/>
           </a:p>
           <a:p>
             <a:pPr marL="0" indent="0" algn="l">
               <a:buNone/>
             </a:pPr>
             <a:r>
-              <a:rPr lang="en-US" sz="1700" dirty="0">
+              <a:rPr lang="en-US" sz="2400" b="1" dirty="0">
                 <a:solidFill>
                   <a:srgbClr val="E0E0E0"/>
                 </a:solidFill>
@@ -5583,7 +5583,7 @@
               <a:t>x = random.</a:t>
             </a:r>
             <a:r>
-              <a:rPr lang="en-US" sz="1700" dirty="0">
+              <a:rPr lang="en-US" sz="2400" b="1" dirty="0">
                 <a:solidFill>
                   <a:srgbClr val="7FDBFF"/>
                 </a:solidFill>
@@ -5594,7 +5594,7 @@
               <a:t>randint</a:t>
             </a:r>
             <a:r>
-              <a:rPr lang="en-US" sz="1700" dirty="0">
+              <a:rPr lang="en-US" sz="2400" b="1" dirty="0">
                 <a:solidFill>
                   <a:srgbClr val="E0E0E0"/>
                 </a:solidFill>
@@ -5605,7 +5605,7 @@
               <a:t>(</a:t>
             </a:r>
             <a:r>
-              <a:rPr lang="en-US" sz="1700" dirty="0">
+              <a:rPr lang="en-US" sz="2400" b="1" dirty="0">
                 <a:solidFill>
                   <a:srgbClr val="FFD166"/>
                 </a:solidFill>
@@ -5616,7 +5616,7 @@
               <a:t>-300</a:t>
             </a:r>
             <a:r>
-              <a:rPr lang="en-US" sz="1700" dirty="0">
+              <a:rPr lang="en-US" sz="2400" b="1" dirty="0">
                 <a:solidFill>
                   <a:srgbClr val="E0E0E0"/>
                 </a:solidFill>
@@ -5627,7 +5627,7 @@
               <a:t>, </a:t>
             </a:r>
             <a:r>
-              <a:rPr lang="en-US" sz="1700" dirty="0">
+              <a:rPr lang="en-US" sz="2400" b="1" dirty="0">
                 <a:solidFill>
                   <a:srgbClr val="FFD166"/>
                 </a:solidFill>
@@ -5638,7 +5638,7 @@
               <a:t>300</a:t>
             </a:r>
             <a:r>
-              <a:rPr lang="en-US" sz="1700" dirty="0">
+              <a:rPr lang="en-US" sz="2400" b="1" dirty="0">
                 <a:solidFill>
                   <a:srgbClr val="E0E0E0"/>
                 </a:solidFill>
@@ -5648,7 +5648,7 @@
               </a:rPr>
               <a:t>)</a:t>
             </a:r>
-            <a:endParaRPr lang="en-US" sz="1700" dirty="0"/>
+            <a:endParaRPr lang="en-US" sz="2400" b="1" dirty="0"/>
           </a:p>
         </p:txBody>
       </p:sp>
@@ -5945,7 +5945,7 @@
           </a:prstGeom>
           <a:extLst>
             <a:ext uri="{C572A759-6A51-4108-AA02-DFA0A04FC94B}">
-              <ma14:wrappingTextBoxFlag xmlns="" xmlns:ma14="http://schemas.microsoft.com/office/mac/drawingml/2011/main" val="0"/>
+              <ma14:wrappingTextBoxFlag xmlns:ma14="http://schemas.microsoft.com/office/mac/drawingml/2011/main" xmlns="" val="0"/>
             </a:ext>
           </a:extLst>
         </p:spPr>
@@ -7594,7 +7594,7 @@
           </a:prstGeom>
           <a:extLst>
             <a:ext uri="{C572A759-6A51-4108-AA02-DFA0A04FC94B}">
-              <ma14:wrappingTextBoxFlag xmlns="" xmlns:ma14="http://schemas.microsoft.com/office/mac/drawingml/2011/main" val="0"/>
+              <ma14:wrappingTextBoxFlag xmlns:ma14="http://schemas.microsoft.com/office/mac/drawingml/2011/main" xmlns="" val="0"/>
             </a:ext>
           </a:extLst>
         </p:spPr>
@@ -8381,7 +8381,7 @@
           </a:prstGeom>
           <a:extLst>
             <a:ext uri="{C572A759-6A51-4108-AA02-DFA0A04FC94B}">
-              <ma14:wrappingTextBoxFlag xmlns="" xmlns:ma14="http://schemas.microsoft.com/office/mac/drawingml/2011/main" val="0"/>
+              <ma14:wrappingTextBoxFlag xmlns:ma14="http://schemas.microsoft.com/office/mac/drawingml/2011/main" xmlns="" val="0"/>
             </a:ext>
           </a:extLst>
         </p:spPr>
@@ -9133,7 +9133,7 @@
                   <a:schemeClr val="bg1"/>
                 </a:solidFill>
               </a:rPr>
-              <a:t>צבע רקע למסך (bgcolor)‎</a:t>
+              <a:t>צבע רקע למסך‎</a:t>
             </a:r>
             <a:endParaRPr lang="he-IL" sz="1700" dirty="0"/>
           </a:p>
@@ -9327,7 +9327,7 @@
                   <a:schemeClr val="bg1"/>
                 </a:solidFill>
               </a:rPr>
-              <a:t>שמש צהובה צבועה בפינה (circle)‎</a:t>
+              <a:t>שמש צהובה צבועה בפינה‎</a:t>
             </a:r>
             <a:endParaRPr lang="he-IL" sz="1700" dirty="0"/>
           </a:p>
@@ -9712,20 +9712,25 @@
               <a:buNone/>
             </a:pPr>
             <a:r>
-              <a:rPr lang="he-IL" altLang="en-US" sz="1500" b="1" dirty="0">
-                <a:solidFill>
-                  <a:schemeClr val="accent5"/>
-                </a:solidFill>
-              </a:rPr>
-              <a:t>בחירה (10 נק')‎: </a:t>
-            </a:r>
-            <a:r>
               <a:rPr lang="he-IL" altLang="en-US" sz="1500" dirty="0">
                 <a:solidFill>
                   <a:schemeClr val="bg1"/>
                 </a:solidFill>
               </a:rPr>
-              <a:t>משתנה time_of_day ו-if ליום/לילה, או עץ / ענן / פרחים, או כוכבים במקומות אקראיים (random)‎</a:t>
+              <a:t>- משתנה time_of_day ו-if שנה צבע ליום/לילה</a:t>
+            </a:r>
+          </a:p>
+          <a:p>
+            <a:pPr marL="0" indent="0" algn="r" rtl="1">
+              <a:buNone/>
+            </a:pPr>
+            <a:r>
+              <a:rPr lang="he-IL" altLang="en-US" sz="1500" dirty="0">
+                <a:solidFill>
+                  <a:schemeClr val="bg1"/>
+                </a:solidFill>
+              </a:rPr>
+              <a:t>- עץ / ענן / פרחים, או כוכבים במקומות אקראיים</a:t>
             </a:r>
             <a:endParaRPr lang="he-IL" sz="1500" dirty="0"/>
           </a:p>
@@ -11033,7 +11038,7 @@
           </a:prstGeom>
           <a:extLst>
             <a:ext uri="{C572A759-6A51-4108-AA02-DFA0A04FC94B}">
-              <ma14:wrappingTextBoxFlag xmlns="" xmlns:ma14="http://schemas.microsoft.com/office/mac/drawingml/2011/main" val="0"/>
+              <ma14:wrappingTextBoxFlag xmlns:ma14="http://schemas.microsoft.com/office/mac/drawingml/2011/main" xmlns="" val="0"/>
             </a:ext>
           </a:extLst>
         </p:spPr>
@@ -12336,7 +12341,7 @@
           </a:prstGeom>
           <a:extLst>
             <a:ext uri="{C572A759-6A51-4108-AA02-DFA0A04FC94B}">
-              <ma14:wrappingTextBoxFlag xmlns="" xmlns:ma14="http://schemas.microsoft.com/office/mac/drawingml/2011/main" val="0"/>
+              <ma14:wrappingTextBoxFlag xmlns:ma14="http://schemas.microsoft.com/office/mac/drawingml/2011/main" xmlns="" val="0"/>
             </a:ext>
           </a:extLst>
         </p:spPr>
@@ -13020,7 +13025,7 @@
           </a:prstGeom>
           <a:extLst>
             <a:ext uri="{C572A759-6A51-4108-AA02-DFA0A04FC94B}">
-              <ma14:wrappingTextBoxFlag xmlns="" xmlns:ma14="http://schemas.microsoft.com/office/mac/drawingml/2011/main" val="0"/>
+              <ma14:wrappingTextBoxFlag xmlns:ma14="http://schemas.microsoft.com/office/mac/drawingml/2011/main" xmlns="" val="0"/>
             </a:ext>
           </a:extLst>
         </p:spPr>
@@ -13794,7 +13799,7 @@
           </a:prstGeom>
           <a:extLst>
             <a:ext uri="{C572A759-6A51-4108-AA02-DFA0A04FC94B}">
-              <ma14:wrappingTextBoxFlag xmlns="" xmlns:ma14="http://schemas.microsoft.com/office/mac/drawingml/2011/main" val="0"/>
+              <ma14:wrappingTextBoxFlag xmlns:ma14="http://schemas.microsoft.com/office/mac/drawingml/2011/main" xmlns="" val="0"/>
             </a:ext>
           </a:extLst>
         </p:spPr>
@@ -14486,54 +14491,13 @@
       </p:sp>
       <p:sp>
         <p:nvSpPr>
-          <p:cNvPr id="20" name="code-bg"/>
-          <p:cNvSpPr/>
-          <p:nvPr/>
-        </p:nvSpPr>
-        <p:spPr>
-          <a:xfrm>
-            <a:off x="822960" y="4206240"/>
-            <a:ext cx="4937760" cy="1554480"/>
-          </a:xfrm>
-          <a:prstGeom prst="roundRect">
-            <a:avLst>
-              <a:gd name="adj" fmla="val 7059"/>
-            </a:avLst>
-          </a:prstGeom>
-          <a:solidFill>
-            <a:srgbClr val="1E1E2E"/>
-          </a:solidFill>
-          <a:ln w="12700">
-            <a:solidFill>
-              <a:srgbClr val="1E1E2E"/>
-            </a:solidFill>
-            <a:prstDash val="solid"/>
-          </a:ln>
-          <a:effectLst>
-            <a:outerShdw blurRad="76200" dist="25400" dir="5400000" algn="bl" rotWithShape="0">
-              <a:srgbClr val="000000">
-                <a:alpha val="18000"/>
-              </a:srgbClr>
-            </a:outerShdw>
-          </a:effectLst>
-        </p:spPr>
-        <p:txBody>
-          <a:bodyPr/>
-          <a:lstStyle/>
-          <a:p>
-            <a:endParaRPr/>
-          </a:p>
-        </p:txBody>
-      </p:sp>
-      <p:sp>
-        <p:nvSpPr>
           <p:cNvPr id="21" name="code"/>
           <p:cNvSpPr txBox="1"/>
           <p:nvPr/>
         </p:nvSpPr>
         <p:spPr>
           <a:xfrm>
-            <a:off x="1051560" y="4370832"/>
+            <a:off x="762000" y="4261104"/>
             <a:ext cx="4480560" cy="1225296"/>
           </a:xfrm>
           <a:prstGeom prst="rect">
@@ -14550,315 +14514,63 @@
               <a:buNone/>
             </a:pPr>
             <a:r>
-              <a:rPr lang="en-US" sz="1500" dirty="0">
-                <a:solidFill>
-                  <a:srgbClr val="E0E0E0"/>
-                </a:solidFill>
-                <a:latin typeface="Courier New" pitchFamily="34" charset="0"/>
-                <a:ea typeface="Courier New" pitchFamily="34" charset="-122"/>
-                <a:cs typeface="Courier New" pitchFamily="34" charset="-120"/>
-              </a:rPr>
-              <a:t>t.</a:t>
-            </a:r>
-            <a:r>
-              <a:rPr lang="en-US" sz="1500" dirty="0">
-                <a:solidFill>
-                  <a:srgbClr val="7FDBFF"/>
-                </a:solidFill>
-                <a:latin typeface="Courier New" pitchFamily="34" charset="0"/>
-                <a:ea typeface="Courier New" pitchFamily="34" charset="-122"/>
-                <a:cs typeface="Courier New" pitchFamily="34" charset="-120"/>
-              </a:rPr>
-              <a:t>forward</a:t>
-            </a:r>
-            <a:r>
-              <a:rPr lang="en-US" sz="1500" dirty="0">
-                <a:solidFill>
-                  <a:srgbClr val="E0E0E0"/>
-                </a:solidFill>
-                <a:latin typeface="Courier New" pitchFamily="34" charset="0"/>
-                <a:ea typeface="Courier New" pitchFamily="34" charset="-122"/>
-                <a:cs typeface="Courier New" pitchFamily="34" charset="-120"/>
-              </a:rPr>
-              <a:t>(</a:t>
-            </a:r>
-            <a:r>
-              <a:rPr lang="en-US" sz="1500" dirty="0">
-                <a:solidFill>
-                  <a:srgbClr val="FFD166"/>
-                </a:solidFill>
-                <a:latin typeface="Courier New" pitchFamily="34" charset="0"/>
-                <a:ea typeface="Courier New" pitchFamily="34" charset="-122"/>
-                <a:cs typeface="Courier New" pitchFamily="34" charset="-120"/>
-              </a:rPr>
-              <a:t>150</a:t>
-            </a:r>
-            <a:r>
-              <a:rPr lang="en-US" sz="1500" dirty="0">
-                <a:solidFill>
-                  <a:srgbClr val="E0E0E0"/>
-                </a:solidFill>
-                <a:latin typeface="Courier New" pitchFamily="34" charset="0"/>
-                <a:ea typeface="Courier New" pitchFamily="34" charset="-122"/>
-                <a:cs typeface="Courier New" pitchFamily="34" charset="-120"/>
-              </a:rPr>
-              <a:t>); t.</a:t>
-            </a:r>
-            <a:r>
-              <a:rPr lang="en-US" sz="1500" dirty="0">
-                <a:solidFill>
-                  <a:srgbClr val="7FDBFF"/>
-                </a:solidFill>
-                <a:latin typeface="Courier New" pitchFamily="34" charset="0"/>
-                <a:ea typeface="Courier New" pitchFamily="34" charset="-122"/>
-                <a:cs typeface="Courier New" pitchFamily="34" charset="-120"/>
-              </a:rPr>
-              <a:t>left</a:t>
-            </a:r>
-            <a:r>
-              <a:rPr lang="en-US" sz="1500" dirty="0">
-                <a:solidFill>
-                  <a:srgbClr val="E0E0E0"/>
-                </a:solidFill>
-                <a:latin typeface="Courier New" pitchFamily="34" charset="0"/>
-                <a:ea typeface="Courier New" pitchFamily="34" charset="-122"/>
-                <a:cs typeface="Courier New" pitchFamily="34" charset="-120"/>
-              </a:rPr>
-              <a:t>(</a:t>
-            </a:r>
-            <a:r>
-              <a:rPr lang="en-US" sz="1500" dirty="0">
-                <a:solidFill>
-                  <a:srgbClr val="FFD166"/>
-                </a:solidFill>
-                <a:latin typeface="Courier New" pitchFamily="34" charset="0"/>
-                <a:ea typeface="Courier New" pitchFamily="34" charset="-122"/>
-                <a:cs typeface="Courier New" pitchFamily="34" charset="-120"/>
-              </a:rPr>
-              <a:t>120</a:t>
-            </a:r>
-            <a:r>
-              <a:rPr lang="en-US" sz="1500" dirty="0">
-                <a:solidFill>
-                  <a:srgbClr val="E0E0E0"/>
-                </a:solidFill>
-                <a:latin typeface="Courier New" pitchFamily="34" charset="0"/>
-                <a:ea typeface="Courier New" pitchFamily="34" charset="-122"/>
-                <a:cs typeface="Courier New" pitchFamily="34" charset="-120"/>
-              </a:rPr>
-              <a:t>)</a:t>
-            </a:r>
-            <a:endParaRPr lang="en-US" sz="1500" dirty="0"/>
+              <a:rPr lang="en-US" sz="2000" b="1" dirty="0">
+                <a:latin typeface="Courier New" pitchFamily="34" charset="0"/>
+                <a:ea typeface="Courier New" pitchFamily="34" charset="-122"/>
+                <a:cs typeface="Courier New" pitchFamily="34" charset="-120"/>
+              </a:rPr>
+              <a:t>t.forward(150)</a:t>
+            </a:r>
           </a:p>
           <a:p>
             <a:pPr marL="0" indent="0" algn="l">
               <a:buNone/>
             </a:pPr>
             <a:r>
-              <a:rPr lang="en-US" sz="1500" dirty="0">
-                <a:solidFill>
-                  <a:srgbClr val="E0E0E0"/>
-                </a:solidFill>
-                <a:latin typeface="Courier New" pitchFamily="34" charset="0"/>
-                <a:ea typeface="Courier New" pitchFamily="34" charset="-122"/>
-                <a:cs typeface="Courier New" pitchFamily="34" charset="-120"/>
-              </a:rPr>
-              <a:t>t.</a:t>
-            </a:r>
-            <a:r>
-              <a:rPr lang="en-US" sz="1500" dirty="0">
-                <a:solidFill>
-                  <a:srgbClr val="7FDBFF"/>
-                </a:solidFill>
-                <a:latin typeface="Courier New" pitchFamily="34" charset="0"/>
-                <a:ea typeface="Courier New" pitchFamily="34" charset="-122"/>
-                <a:cs typeface="Courier New" pitchFamily="34" charset="-120"/>
-              </a:rPr>
-              <a:t>forward</a:t>
-            </a:r>
-            <a:r>
-              <a:rPr lang="en-US" sz="1500" dirty="0">
-                <a:solidFill>
-                  <a:srgbClr val="E0E0E0"/>
-                </a:solidFill>
-                <a:latin typeface="Courier New" pitchFamily="34" charset="0"/>
-                <a:ea typeface="Courier New" pitchFamily="34" charset="-122"/>
-                <a:cs typeface="Courier New" pitchFamily="34" charset="-120"/>
-              </a:rPr>
-              <a:t>(</a:t>
-            </a:r>
-            <a:r>
-              <a:rPr lang="en-US" sz="1500" dirty="0">
-                <a:solidFill>
-                  <a:srgbClr val="FFD166"/>
-                </a:solidFill>
-                <a:latin typeface="Courier New" pitchFamily="34" charset="0"/>
-                <a:ea typeface="Courier New" pitchFamily="34" charset="-122"/>
-                <a:cs typeface="Courier New" pitchFamily="34" charset="-120"/>
-              </a:rPr>
-              <a:t>150</a:t>
-            </a:r>
-            <a:r>
-              <a:rPr lang="en-US" sz="1500" dirty="0">
-                <a:solidFill>
-                  <a:srgbClr val="E0E0E0"/>
-                </a:solidFill>
-                <a:latin typeface="Courier New" pitchFamily="34" charset="0"/>
-                <a:ea typeface="Courier New" pitchFamily="34" charset="-122"/>
-                <a:cs typeface="Courier New" pitchFamily="34" charset="-120"/>
-              </a:rPr>
-              <a:t>); t.</a:t>
-            </a:r>
-            <a:r>
-              <a:rPr lang="en-US" sz="1500" dirty="0">
-                <a:solidFill>
-                  <a:srgbClr val="7FDBFF"/>
-                </a:solidFill>
-                <a:latin typeface="Courier New" pitchFamily="34" charset="0"/>
-                <a:ea typeface="Courier New" pitchFamily="34" charset="-122"/>
-                <a:cs typeface="Courier New" pitchFamily="34" charset="-120"/>
-              </a:rPr>
-              <a:t>left</a:t>
-            </a:r>
-            <a:r>
-              <a:rPr lang="en-US" sz="1500" dirty="0">
-                <a:solidFill>
-                  <a:srgbClr val="E0E0E0"/>
-                </a:solidFill>
-                <a:latin typeface="Courier New" pitchFamily="34" charset="0"/>
-                <a:ea typeface="Courier New" pitchFamily="34" charset="-122"/>
-                <a:cs typeface="Courier New" pitchFamily="34" charset="-120"/>
-              </a:rPr>
-              <a:t>(</a:t>
-            </a:r>
-            <a:r>
-              <a:rPr lang="en-US" sz="1500" dirty="0">
-                <a:solidFill>
-                  <a:srgbClr val="FFD166"/>
-                </a:solidFill>
-                <a:latin typeface="Courier New" pitchFamily="34" charset="0"/>
-                <a:ea typeface="Courier New" pitchFamily="34" charset="-122"/>
-                <a:cs typeface="Courier New" pitchFamily="34" charset="-120"/>
-              </a:rPr>
-              <a:t>120</a:t>
-            </a:r>
-            <a:r>
-              <a:rPr lang="en-US" sz="1500" dirty="0">
-                <a:solidFill>
-                  <a:srgbClr val="E0E0E0"/>
-                </a:solidFill>
-                <a:latin typeface="Courier New" pitchFamily="34" charset="0"/>
-                <a:ea typeface="Courier New" pitchFamily="34" charset="-122"/>
-                <a:cs typeface="Courier New" pitchFamily="34" charset="-120"/>
-              </a:rPr>
-              <a:t>)</a:t>
-            </a:r>
-            <a:endParaRPr lang="en-US" sz="1500" dirty="0"/>
+              <a:rPr lang="en-US" sz="2000" b="1" dirty="0" err="1">
+                <a:latin typeface="Courier New" pitchFamily="34" charset="0"/>
+                <a:ea typeface="Courier New" pitchFamily="34" charset="-122"/>
+                <a:cs typeface="Courier New" pitchFamily="34" charset="-120"/>
+              </a:rPr>
+              <a:t>t.left</a:t>
+            </a:r>
+            <a:r>
+              <a:rPr lang="en-US" sz="2000" b="1" dirty="0">
+                <a:latin typeface="Courier New" pitchFamily="34" charset="0"/>
+                <a:ea typeface="Courier New" pitchFamily="34" charset="-122"/>
+                <a:cs typeface="Courier New" pitchFamily="34" charset="-120"/>
+              </a:rPr>
+              <a:t>(120)</a:t>
+            </a:r>
+            <a:endParaRPr lang="en-US" sz="2000" b="1" dirty="0"/>
           </a:p>
           <a:p>
             <a:pPr marL="0" indent="0" algn="l">
               <a:buNone/>
             </a:pPr>
             <a:r>
-              <a:rPr lang="en-US" sz="1500" dirty="0">
-                <a:solidFill>
-                  <a:srgbClr val="E0E0E0"/>
-                </a:solidFill>
-                <a:latin typeface="Courier New" pitchFamily="34" charset="0"/>
-                <a:ea typeface="Courier New" pitchFamily="34" charset="-122"/>
-                <a:cs typeface="Courier New" pitchFamily="34" charset="-120"/>
-              </a:rPr>
-              <a:t>t.</a:t>
-            </a:r>
-            <a:r>
-              <a:rPr lang="en-US" sz="1500" dirty="0">
-                <a:solidFill>
-                  <a:srgbClr val="7FDBFF"/>
-                </a:solidFill>
-                <a:latin typeface="Courier New" pitchFamily="34" charset="0"/>
-                <a:ea typeface="Courier New" pitchFamily="34" charset="-122"/>
-                <a:cs typeface="Courier New" pitchFamily="34" charset="-120"/>
-              </a:rPr>
-              <a:t>forward</a:t>
-            </a:r>
-            <a:r>
-              <a:rPr lang="en-US" sz="1500" dirty="0">
-                <a:solidFill>
-                  <a:srgbClr val="E0E0E0"/>
-                </a:solidFill>
-                <a:latin typeface="Courier New" pitchFamily="34" charset="0"/>
-                <a:ea typeface="Courier New" pitchFamily="34" charset="-122"/>
-                <a:cs typeface="Courier New" pitchFamily="34" charset="-120"/>
-              </a:rPr>
-              <a:t>(</a:t>
-            </a:r>
-            <a:r>
-              <a:rPr lang="en-US" sz="1500" dirty="0">
-                <a:solidFill>
-                  <a:srgbClr val="FFD166"/>
-                </a:solidFill>
-                <a:latin typeface="Courier New" pitchFamily="34" charset="0"/>
-                <a:ea typeface="Courier New" pitchFamily="34" charset="-122"/>
-                <a:cs typeface="Courier New" pitchFamily="34" charset="-120"/>
-              </a:rPr>
-              <a:t>150</a:t>
-            </a:r>
-            <a:r>
-              <a:rPr lang="en-US" sz="1500" dirty="0">
-                <a:solidFill>
-                  <a:srgbClr val="E0E0E0"/>
-                </a:solidFill>
-                <a:latin typeface="Courier New" pitchFamily="34" charset="0"/>
-                <a:ea typeface="Courier New" pitchFamily="34" charset="-122"/>
-                <a:cs typeface="Courier New" pitchFamily="34" charset="-120"/>
-              </a:rPr>
-              <a:t>); t.</a:t>
-            </a:r>
-            <a:r>
-              <a:rPr lang="en-US" sz="1500" dirty="0">
-                <a:solidFill>
-                  <a:srgbClr val="7FDBFF"/>
-                </a:solidFill>
-                <a:latin typeface="Courier New" pitchFamily="34" charset="0"/>
-                <a:ea typeface="Courier New" pitchFamily="34" charset="-122"/>
-                <a:cs typeface="Courier New" pitchFamily="34" charset="-120"/>
-              </a:rPr>
-              <a:t>left</a:t>
-            </a:r>
-            <a:r>
-              <a:rPr lang="en-US" sz="1500" dirty="0">
-                <a:solidFill>
-                  <a:srgbClr val="E0E0E0"/>
-                </a:solidFill>
-                <a:latin typeface="Courier New" pitchFamily="34" charset="0"/>
-                <a:ea typeface="Courier New" pitchFamily="34" charset="-122"/>
-                <a:cs typeface="Courier New" pitchFamily="34" charset="-120"/>
-              </a:rPr>
-              <a:t>(</a:t>
-            </a:r>
-            <a:r>
-              <a:rPr lang="en-US" sz="1500" dirty="0">
-                <a:solidFill>
-                  <a:srgbClr val="FFD166"/>
-                </a:solidFill>
-                <a:latin typeface="Courier New" pitchFamily="34" charset="0"/>
-                <a:ea typeface="Courier New" pitchFamily="34" charset="-122"/>
-                <a:cs typeface="Courier New" pitchFamily="34" charset="-120"/>
-              </a:rPr>
-              <a:t>120</a:t>
-            </a:r>
-            <a:r>
-              <a:rPr lang="en-US" sz="1500" dirty="0">
-                <a:solidFill>
-                  <a:srgbClr val="E0E0E0"/>
-                </a:solidFill>
-                <a:latin typeface="Courier New" pitchFamily="34" charset="0"/>
-                <a:ea typeface="Courier New" pitchFamily="34" charset="-122"/>
-                <a:cs typeface="Courier New" pitchFamily="34" charset="-120"/>
-              </a:rPr>
-              <a:t>)</a:t>
-            </a:r>
-            <a:endParaRPr lang="en-US" sz="1500" dirty="0"/>
+              <a:rPr lang="en-US" sz="2000" b="1" dirty="0">
+                <a:latin typeface="Courier New" pitchFamily="34" charset="0"/>
+                <a:ea typeface="Courier New" pitchFamily="34" charset="-122"/>
+                <a:cs typeface="Courier New" pitchFamily="34" charset="-120"/>
+              </a:rPr>
+              <a:t>t.forward(150); t.left(120)</a:t>
+            </a:r>
+            <a:endParaRPr lang="en-US" sz="2000" b="1" dirty="0"/>
+          </a:p>
+          <a:p>
+            <a:pPr marL="0" indent="0" algn="l">
+              <a:buNone/>
+            </a:pPr>
+            <a:r>
+              <a:rPr lang="en-US" sz="2000" b="1" dirty="0">
+                <a:latin typeface="Courier New" pitchFamily="34" charset="0"/>
+                <a:ea typeface="Courier New" pitchFamily="34" charset="-122"/>
+                <a:cs typeface="Courier New" pitchFamily="34" charset="-120"/>
+              </a:rPr>
+              <a:t>t.forward(150); t.left(120)</a:t>
+            </a:r>
+            <a:endParaRPr lang="en-US" sz="2000" b="1" dirty="0"/>
           </a:p>
         </p:txBody>
       </p:sp>
@@ -14882,7 +14594,7 @@
           </a:prstGeom>
           <a:extLst>
             <a:ext uri="{C572A759-6A51-4108-AA02-DFA0A04FC94B}">
-              <ma14:wrappingTextBoxFlag xmlns="" xmlns:ma14="http://schemas.microsoft.com/office/mac/drawingml/2011/main" val="0"/>
+              <ma14:wrappingTextBoxFlag xmlns:ma14="http://schemas.microsoft.com/office/mac/drawingml/2011/main" xmlns="" val="0"/>
             </a:ext>
           </a:extLst>
         </p:spPr>
@@ -15031,7 +14743,7 @@
               <a:buNone/>
             </a:pPr>
             <a:r>
-              <a:rPr lang="en-US" sz="1900" dirty="0">
+              <a:rPr lang="en-US" sz="2400" b="1" dirty="0">
                 <a:solidFill>
                   <a:srgbClr val="E0E0E0"/>
                 </a:solidFill>
@@ -15042,7 +14754,7 @@
               <a:t>screen = turtle.</a:t>
             </a:r>
             <a:r>
-              <a:rPr lang="en-US" sz="1900" dirty="0">
+              <a:rPr lang="en-US" sz="2400" b="1" dirty="0">
                 <a:solidFill>
                   <a:srgbClr val="7FDBFF"/>
                 </a:solidFill>
@@ -15053,7 +14765,7 @@
               <a:t>Screen</a:t>
             </a:r>
             <a:r>
-              <a:rPr lang="en-US" sz="1900" dirty="0">
+              <a:rPr lang="en-US" sz="2400" b="1" dirty="0">
                 <a:solidFill>
                   <a:srgbClr val="E0E0E0"/>
                 </a:solidFill>
@@ -15063,14 +14775,14 @@
               </a:rPr>
               <a:t>()</a:t>
             </a:r>
-            <a:endParaRPr lang="en-US" sz="1900" dirty="0"/>
+            <a:endParaRPr lang="en-US" sz="2400" b="1" dirty="0"/>
           </a:p>
           <a:p>
             <a:pPr marL="0" indent="0" algn="l">
               <a:buNone/>
             </a:pPr>
             <a:r>
-              <a:rPr lang="en-US" sz="1900" dirty="0">
+              <a:rPr lang="en-US" sz="2400" b="1" dirty="0">
                 <a:solidFill>
                   <a:srgbClr val="E0E0E0"/>
                 </a:solidFill>
@@ -15081,7 +14793,7 @@
               <a:t>screen.</a:t>
             </a:r>
             <a:r>
-              <a:rPr lang="en-US" sz="1900" dirty="0">
+              <a:rPr lang="en-US" sz="2400" b="1" dirty="0">
                 <a:solidFill>
                   <a:srgbClr val="7FDBFF"/>
                 </a:solidFill>
@@ -15092,7 +14804,7 @@
               <a:t>bgcolor</a:t>
             </a:r>
             <a:r>
-              <a:rPr lang="en-US" sz="1900" dirty="0">
+              <a:rPr lang="en-US" sz="2400" b="1" dirty="0">
                 <a:solidFill>
                   <a:srgbClr val="E0E0E0"/>
                 </a:solidFill>
@@ -15103,7 +14815,7 @@
               <a:t>(</a:t>
             </a:r>
             <a:r>
-              <a:rPr lang="en-US" sz="1900" dirty="0">
+              <a:rPr lang="en-US" sz="2400" b="1" dirty="0">
                 <a:solidFill>
                   <a:srgbClr val="95E06C"/>
                 </a:solidFill>
@@ -15114,7 +14826,7 @@
               <a:t>"lightyellow"</a:t>
             </a:r>
             <a:r>
-              <a:rPr lang="en-US" sz="1900" dirty="0">
+              <a:rPr lang="en-US" sz="2400" b="1" dirty="0">
                 <a:solidFill>
                   <a:srgbClr val="E0E0E0"/>
                 </a:solidFill>
@@ -15124,14 +14836,14 @@
               </a:rPr>
               <a:t>)</a:t>
             </a:r>
-            <a:endParaRPr lang="en-US" sz="1900" dirty="0"/>
+            <a:endParaRPr lang="en-US" sz="2400" b="1" dirty="0"/>
           </a:p>
           <a:p>
             <a:pPr marL="0" indent="0" algn="l">
               <a:buNone/>
             </a:pPr>
             <a:r>
-              <a:rPr lang="en-US" sz="1900" dirty="0">
+              <a:rPr lang="en-US" sz="2400" b="1" dirty="0">
                 <a:solidFill>
                   <a:srgbClr val="E0E0E0"/>
                 </a:solidFill>
@@ -15142,7 +14854,7 @@
               <a:t>t.</a:t>
             </a:r>
             <a:r>
-              <a:rPr lang="en-US" sz="1900" dirty="0">
+              <a:rPr lang="en-US" sz="2400" b="1" dirty="0">
                 <a:solidFill>
                   <a:srgbClr val="7FDBFF"/>
                 </a:solidFill>
@@ -15153,7 +14865,7 @@
               <a:t>color</a:t>
             </a:r>
             <a:r>
-              <a:rPr lang="en-US" sz="1900" dirty="0">
+              <a:rPr lang="en-US" sz="2400" b="1" dirty="0">
                 <a:solidFill>
                   <a:srgbClr val="E0E0E0"/>
                 </a:solidFill>
@@ -15164,7 +14876,7 @@
               <a:t>(</a:t>
             </a:r>
             <a:r>
-              <a:rPr lang="en-US" sz="1900" dirty="0">
+              <a:rPr lang="en-US" sz="2400" b="1" dirty="0">
                 <a:solidFill>
                   <a:srgbClr val="95E06C"/>
                 </a:solidFill>
@@ -15175,7 +14887,7 @@
               <a:t>"red"</a:t>
             </a:r>
             <a:r>
-              <a:rPr lang="en-US" sz="1900" dirty="0">
+              <a:rPr lang="en-US" sz="2400" b="1" dirty="0">
                 <a:solidFill>
                   <a:srgbClr val="E0E0E0"/>
                 </a:solidFill>
@@ -15185,14 +14897,14 @@
               </a:rPr>
               <a:t>)</a:t>
             </a:r>
-            <a:endParaRPr lang="en-US" sz="1900" dirty="0"/>
+            <a:endParaRPr lang="en-US" sz="2400" b="1" dirty="0"/>
           </a:p>
           <a:p>
             <a:pPr marL="0" indent="0" algn="l">
               <a:buNone/>
             </a:pPr>
             <a:r>
-              <a:rPr lang="en-US" sz="1900" dirty="0">
+              <a:rPr lang="en-US" sz="2400" b="1" dirty="0">
                 <a:solidFill>
                   <a:srgbClr val="E0E0E0"/>
                 </a:solidFill>
@@ -15203,7 +14915,7 @@
               <a:t>t.</a:t>
             </a:r>
             <a:r>
-              <a:rPr lang="en-US" sz="1900" dirty="0">
+              <a:rPr lang="en-US" sz="2400" b="1" dirty="0">
                 <a:solidFill>
                   <a:srgbClr val="7FDBFF"/>
                 </a:solidFill>
@@ -15214,7 +14926,7 @@
               <a:t>pensize</a:t>
             </a:r>
             <a:r>
-              <a:rPr lang="en-US" sz="1900" dirty="0">
+              <a:rPr lang="en-US" sz="2400" b="1" dirty="0">
                 <a:solidFill>
                   <a:srgbClr val="E0E0E0"/>
                 </a:solidFill>
@@ -15225,7 +14937,7 @@
               <a:t>(</a:t>
             </a:r>
             <a:r>
-              <a:rPr lang="en-US" sz="1900" dirty="0">
+              <a:rPr lang="en-US" sz="2400" b="1" dirty="0">
                 <a:solidFill>
                   <a:srgbClr val="FFD166"/>
                 </a:solidFill>
@@ -15236,7 +14948,7 @@
               <a:t>5</a:t>
             </a:r>
             <a:r>
-              <a:rPr lang="en-US" sz="1900" dirty="0">
+              <a:rPr lang="en-US" sz="2400" b="1" dirty="0">
                 <a:solidFill>
                   <a:srgbClr val="E0E0E0"/>
                 </a:solidFill>
@@ -15246,14 +14958,14 @@
               </a:rPr>
               <a:t>)</a:t>
             </a:r>
-            <a:endParaRPr lang="en-US" sz="1900" dirty="0"/>
+            <a:endParaRPr lang="en-US" sz="2400" b="1" dirty="0"/>
           </a:p>
           <a:p>
             <a:pPr marL="0" indent="0" algn="l">
               <a:buNone/>
             </a:pPr>
             <a:r>
-              <a:rPr lang="en-US" sz="1900" dirty="0">
+              <a:rPr lang="en-US" sz="2400" b="1" dirty="0">
                 <a:solidFill>
                   <a:srgbClr val="E0E0E0"/>
                 </a:solidFill>
@@ -15264,7 +14976,7 @@
               <a:t>t.</a:t>
             </a:r>
             <a:r>
-              <a:rPr lang="en-US" sz="1900" dirty="0">
+              <a:rPr lang="en-US" sz="2400" b="1" dirty="0">
                 <a:solidFill>
                   <a:srgbClr val="7FDBFF"/>
                 </a:solidFill>
@@ -15275,7 +14987,7 @@
               <a:t>speed</a:t>
             </a:r>
             <a:r>
-              <a:rPr lang="en-US" sz="1900" dirty="0">
+              <a:rPr lang="en-US" sz="2400" b="1" dirty="0">
                 <a:solidFill>
                   <a:srgbClr val="E0E0E0"/>
                 </a:solidFill>
@@ -15286,7 +14998,7 @@
               <a:t>(</a:t>
             </a:r>
             <a:r>
-              <a:rPr lang="en-US" sz="1900" dirty="0">
+              <a:rPr lang="en-US" sz="2400" b="1" dirty="0">
                 <a:solidFill>
                   <a:srgbClr val="FFD166"/>
                 </a:solidFill>
@@ -15297,7 +15009,7 @@
               <a:t>3</a:t>
             </a:r>
             <a:r>
-              <a:rPr lang="en-US" sz="1900" dirty="0">
+              <a:rPr lang="en-US" sz="2400" b="1" dirty="0">
                 <a:solidFill>
                   <a:srgbClr val="E0E0E0"/>
                 </a:solidFill>
@@ -15307,14 +15019,14 @@
               </a:rPr>
               <a:t>)</a:t>
             </a:r>
-            <a:endParaRPr lang="en-US" sz="1900" dirty="0"/>
+            <a:endParaRPr lang="en-US" sz="2400" b="1" dirty="0"/>
           </a:p>
           <a:p>
             <a:pPr marL="0" indent="0" algn="l">
               <a:buNone/>
             </a:pPr>
             <a:r>
-              <a:rPr lang="en-US" sz="1900" dirty="0">
+              <a:rPr lang="en-US" sz="2400" b="1" dirty="0">
                 <a:solidFill>
                   <a:srgbClr val="E0E0E0"/>
                 </a:solidFill>
@@ -15325,7 +15037,7 @@
               <a:t>t.</a:t>
             </a:r>
             <a:r>
-              <a:rPr lang="en-US" sz="1900" dirty="0">
+              <a:rPr lang="en-US" sz="2400" b="1" dirty="0">
                 <a:solidFill>
                   <a:srgbClr val="7FDBFF"/>
                 </a:solidFill>
@@ -15336,7 +15048,7 @@
               <a:t>shape</a:t>
             </a:r>
             <a:r>
-              <a:rPr lang="en-US" sz="1900" dirty="0">
+              <a:rPr lang="en-US" sz="2400" b="1" dirty="0">
                 <a:solidFill>
                   <a:srgbClr val="E0E0E0"/>
                 </a:solidFill>
@@ -15347,7 +15059,7 @@
               <a:t>(</a:t>
             </a:r>
             <a:r>
-              <a:rPr lang="en-US" sz="1900" dirty="0">
+              <a:rPr lang="en-US" sz="2400" b="1" dirty="0">
                 <a:solidFill>
                   <a:srgbClr val="95E06C"/>
                 </a:solidFill>
@@ -15358,7 +15070,7 @@
               <a:t>"turtle"</a:t>
             </a:r>
             <a:r>
-              <a:rPr lang="en-US" sz="1900" dirty="0">
+              <a:rPr lang="en-US" sz="2400" b="1" dirty="0">
                 <a:solidFill>
                   <a:srgbClr val="E0E0E0"/>
                 </a:solidFill>
@@ -15368,7 +15080,7 @@
               </a:rPr>
               <a:t>)</a:t>
             </a:r>
-            <a:endParaRPr lang="en-US" sz="1900" dirty="0"/>
+            <a:endParaRPr lang="en-US" sz="2400" b="1" dirty="0"/>
           </a:p>
         </p:txBody>
       </p:sp>
@@ -16140,7 +15852,7 @@
           </a:prstGeom>
           <a:extLst>
             <a:ext uri="{C572A759-6A51-4108-AA02-DFA0A04FC94B}">
-              <ma14:wrappingTextBoxFlag xmlns="" xmlns:ma14="http://schemas.microsoft.com/office/mac/drawingml/2011/main" val="0"/>
+              <ma14:wrappingTextBoxFlag xmlns:ma14="http://schemas.microsoft.com/office/mac/drawingml/2011/main" xmlns="" val="0"/>
             </a:ext>
           </a:extLst>
         </p:spPr>
@@ -16968,7 +16680,7 @@
           </a:prstGeom>
           <a:extLst>
             <a:ext uri="{C572A759-6A51-4108-AA02-DFA0A04FC94B}">
-              <ma14:wrappingTextBoxFlag xmlns="" xmlns:ma14="http://schemas.microsoft.com/office/mac/drawingml/2011/main" val="0"/>
+              <ma14:wrappingTextBoxFlag xmlns:ma14="http://schemas.microsoft.com/office/mac/drawingml/2011/main" xmlns="" val="0"/>
             </a:ext>
           </a:extLst>
         </p:spPr>
@@ -17153,7 +16865,7 @@
               <a:buNone/>
             </a:pPr>
             <a:r>
-              <a:rPr lang="en-US" sz="1700" dirty="0">
+              <a:rPr lang="en-US" sz="2400" b="1" dirty="0">
                 <a:solidFill>
                   <a:srgbClr val="E0E0E0"/>
                 </a:solidFill>
@@ -17164,7 +16876,7 @@
               <a:t>t.</a:t>
             </a:r>
             <a:r>
-              <a:rPr lang="en-US" sz="1700" dirty="0">
+              <a:rPr lang="en-US" sz="2400" b="1" dirty="0">
                 <a:solidFill>
                   <a:srgbClr val="7FDBFF"/>
                 </a:solidFill>
@@ -17175,7 +16887,7 @@
               <a:t>forward</a:t>
             </a:r>
             <a:r>
-              <a:rPr lang="en-US" sz="1700" dirty="0">
+              <a:rPr lang="en-US" sz="2400" b="1" dirty="0">
                 <a:solidFill>
                   <a:srgbClr val="E0E0E0"/>
                 </a:solidFill>
@@ -17186,7 +16898,7 @@
               <a:t>(</a:t>
             </a:r>
             <a:r>
-              <a:rPr lang="en-US" sz="1700" dirty="0">
+              <a:rPr lang="en-US" sz="2400" b="1" dirty="0">
                 <a:solidFill>
                   <a:srgbClr val="FFD166"/>
                 </a:solidFill>
@@ -17197,7 +16909,7 @@
               <a:t>100</a:t>
             </a:r>
             <a:r>
-              <a:rPr lang="en-US" sz="1700" dirty="0">
+              <a:rPr lang="en-US" sz="2400" b="1" dirty="0">
                 <a:solidFill>
                   <a:srgbClr val="E0E0E0"/>
                 </a:solidFill>
@@ -17207,14 +16919,14 @@
               </a:rPr>
               <a:t>)</a:t>
             </a:r>
-            <a:endParaRPr lang="en-US" sz="1700" dirty="0"/>
+            <a:endParaRPr lang="en-US" sz="2400" b="1" dirty="0"/>
           </a:p>
           <a:p>
             <a:pPr marL="0" indent="0" algn="l">
               <a:buNone/>
             </a:pPr>
             <a:r>
-              <a:rPr lang="en-US" sz="1700" dirty="0">
+              <a:rPr lang="en-US" sz="2400" b="1" dirty="0">
                 <a:solidFill>
                   <a:srgbClr val="E0E0E0"/>
                 </a:solidFill>
@@ -17225,7 +16937,7 @@
               <a:t>t.</a:t>
             </a:r>
             <a:r>
-              <a:rPr lang="en-US" sz="1700" dirty="0">
+              <a:rPr lang="en-US" sz="2400" b="1" dirty="0">
                 <a:solidFill>
                   <a:srgbClr val="7FDBFF"/>
                 </a:solidFill>
@@ -17236,7 +16948,7 @@
               <a:t>left</a:t>
             </a:r>
             <a:r>
-              <a:rPr lang="en-US" sz="1700" dirty="0">
+              <a:rPr lang="en-US" sz="2400" b="1" dirty="0">
                 <a:solidFill>
                   <a:srgbClr val="E0E0E0"/>
                 </a:solidFill>
@@ -17247,7 +16959,7 @@
               <a:t>(</a:t>
             </a:r>
             <a:r>
-              <a:rPr lang="en-US" sz="1700" dirty="0">
+              <a:rPr lang="en-US" sz="2400" b="1" dirty="0">
                 <a:solidFill>
                   <a:srgbClr val="FFD166"/>
                 </a:solidFill>
@@ -17258,7 +16970,7 @@
               <a:t>90</a:t>
             </a:r>
             <a:r>
-              <a:rPr lang="en-US" sz="1700" dirty="0">
+              <a:rPr lang="en-US" sz="2400" b="1" dirty="0">
                 <a:solidFill>
                   <a:srgbClr val="E0E0E0"/>
                 </a:solidFill>
@@ -17268,14 +16980,14 @@
               </a:rPr>
               <a:t>)</a:t>
             </a:r>
-            <a:endParaRPr lang="en-US" sz="1700" dirty="0"/>
+            <a:endParaRPr lang="en-US" sz="2400" b="1" dirty="0"/>
           </a:p>
           <a:p>
             <a:pPr marL="0" indent="0" algn="l">
               <a:buNone/>
             </a:pPr>
             <a:r>
-              <a:rPr lang="en-US" sz="1700" dirty="0">
+              <a:rPr lang="en-US" sz="2400" b="1" dirty="0">
                 <a:solidFill>
                   <a:srgbClr val="E0E0E0"/>
                 </a:solidFill>
@@ -17286,7 +16998,7 @@
               <a:t>t.</a:t>
             </a:r>
             <a:r>
-              <a:rPr lang="en-US" sz="1700" dirty="0">
+              <a:rPr lang="en-US" sz="2400" b="1" dirty="0">
                 <a:solidFill>
                   <a:srgbClr val="7FDBFF"/>
                 </a:solidFill>
@@ -17297,7 +17009,7 @@
               <a:t>forward</a:t>
             </a:r>
             <a:r>
-              <a:rPr lang="en-US" sz="1700" dirty="0">
+              <a:rPr lang="en-US" sz="2400" b="1" dirty="0">
                 <a:solidFill>
                   <a:srgbClr val="E0E0E0"/>
                 </a:solidFill>
@@ -17308,7 +17020,7 @@
               <a:t>(</a:t>
             </a:r>
             <a:r>
-              <a:rPr lang="en-US" sz="1700" dirty="0">
+              <a:rPr lang="en-US" sz="2400" b="1" dirty="0">
                 <a:solidFill>
                   <a:srgbClr val="FFD166"/>
                 </a:solidFill>
@@ -17319,7 +17031,7 @@
               <a:t>100</a:t>
             </a:r>
             <a:r>
-              <a:rPr lang="en-US" sz="1700" dirty="0">
+              <a:rPr lang="en-US" sz="2400" b="1" dirty="0">
                 <a:solidFill>
                   <a:srgbClr val="E0E0E0"/>
                 </a:solidFill>
@@ -17329,14 +17041,14 @@
               </a:rPr>
               <a:t>)</a:t>
             </a:r>
-            <a:endParaRPr lang="en-US" sz="1700" dirty="0"/>
+            <a:endParaRPr lang="en-US" sz="2400" b="1" dirty="0"/>
           </a:p>
           <a:p>
             <a:pPr marL="0" indent="0" algn="l">
               <a:buNone/>
             </a:pPr>
             <a:r>
-              <a:rPr lang="en-US" sz="1700" dirty="0">
+              <a:rPr lang="en-US" sz="2400" b="1" dirty="0">
                 <a:solidFill>
                   <a:srgbClr val="E0E0E0"/>
                 </a:solidFill>
@@ -17347,7 +17059,7 @@
               <a:t>t.</a:t>
             </a:r>
             <a:r>
-              <a:rPr lang="en-US" sz="1700" dirty="0">
+              <a:rPr lang="en-US" sz="2400" b="1" dirty="0">
                 <a:solidFill>
                   <a:srgbClr val="7FDBFF"/>
                 </a:solidFill>
@@ -17358,7 +17070,7 @@
               <a:t>left</a:t>
             </a:r>
             <a:r>
-              <a:rPr lang="en-US" sz="1700" dirty="0">
+              <a:rPr lang="en-US" sz="2400" b="1" dirty="0">
                 <a:solidFill>
                   <a:srgbClr val="E0E0E0"/>
                 </a:solidFill>
@@ -17369,7 +17081,7 @@
               <a:t>(</a:t>
             </a:r>
             <a:r>
-              <a:rPr lang="en-US" sz="1700" dirty="0">
+              <a:rPr lang="en-US" sz="2400" b="1" dirty="0">
                 <a:solidFill>
                   <a:srgbClr val="FFD166"/>
                 </a:solidFill>
@@ -17380,7 +17092,7 @@
               <a:t>90</a:t>
             </a:r>
             <a:r>
-              <a:rPr lang="en-US" sz="1700" dirty="0">
+              <a:rPr lang="en-US" sz="2400" b="1" dirty="0">
                 <a:solidFill>
                   <a:srgbClr val="E0E0E0"/>
                 </a:solidFill>
@@ -17390,14 +17102,14 @@
               </a:rPr>
               <a:t>)</a:t>
             </a:r>
-            <a:endParaRPr lang="en-US" sz="1700" dirty="0"/>
+            <a:endParaRPr lang="en-US" sz="2400" b="1" dirty="0"/>
           </a:p>
           <a:p>
             <a:pPr marL="0" indent="0" algn="l">
               <a:buNone/>
             </a:pPr>
             <a:r>
-              <a:rPr lang="en-US" sz="1700" dirty="0">
+              <a:rPr lang="en-US" sz="2400" b="1" dirty="0">
                 <a:solidFill>
                   <a:srgbClr val="E0E0E0"/>
                 </a:solidFill>
@@ -17408,7 +17120,7 @@
               <a:t>t.</a:t>
             </a:r>
             <a:r>
-              <a:rPr lang="en-US" sz="1700" dirty="0">
+              <a:rPr lang="en-US" sz="2400" b="1" dirty="0">
                 <a:solidFill>
                   <a:srgbClr val="7FDBFF"/>
                 </a:solidFill>
@@ -17419,7 +17131,7 @@
               <a:t>forward</a:t>
             </a:r>
             <a:r>
-              <a:rPr lang="en-US" sz="1700" dirty="0">
+              <a:rPr lang="en-US" sz="2400" b="1" dirty="0">
                 <a:solidFill>
                   <a:srgbClr val="E0E0E0"/>
                 </a:solidFill>
@@ -17430,7 +17142,7 @@
               <a:t>(</a:t>
             </a:r>
             <a:r>
-              <a:rPr lang="en-US" sz="1700" dirty="0">
+              <a:rPr lang="en-US" sz="2400" b="1" dirty="0">
                 <a:solidFill>
                   <a:srgbClr val="FFD166"/>
                 </a:solidFill>
@@ -17441,7 +17153,7 @@
               <a:t>100</a:t>
             </a:r>
             <a:r>
-              <a:rPr lang="en-US" sz="1700" dirty="0">
+              <a:rPr lang="en-US" sz="2400" b="1" dirty="0">
                 <a:solidFill>
                   <a:srgbClr val="E0E0E0"/>
                 </a:solidFill>
@@ -17451,14 +17163,14 @@
               </a:rPr>
               <a:t>)</a:t>
             </a:r>
-            <a:endParaRPr lang="en-US" sz="1700" dirty="0"/>
+            <a:endParaRPr lang="en-US" sz="2400" b="1" dirty="0"/>
           </a:p>
           <a:p>
             <a:pPr marL="0" indent="0" algn="l">
               <a:buNone/>
             </a:pPr>
             <a:r>
-              <a:rPr lang="en-US" sz="1700" dirty="0">
+              <a:rPr lang="en-US" sz="2400" b="1" dirty="0">
                 <a:solidFill>
                   <a:srgbClr val="E0E0E0"/>
                 </a:solidFill>
@@ -17469,7 +17181,7 @@
               <a:t>t.</a:t>
             </a:r>
             <a:r>
-              <a:rPr lang="en-US" sz="1700" dirty="0">
+              <a:rPr lang="en-US" sz="2400" b="1" dirty="0">
                 <a:solidFill>
                   <a:srgbClr val="7FDBFF"/>
                 </a:solidFill>
@@ -17480,7 +17192,7 @@
               <a:t>left</a:t>
             </a:r>
             <a:r>
-              <a:rPr lang="en-US" sz="1700" dirty="0">
+              <a:rPr lang="en-US" sz="2400" b="1" dirty="0">
                 <a:solidFill>
                   <a:srgbClr val="E0E0E0"/>
                 </a:solidFill>
@@ -17491,7 +17203,7 @@
               <a:t>(</a:t>
             </a:r>
             <a:r>
-              <a:rPr lang="en-US" sz="1700" dirty="0">
+              <a:rPr lang="en-US" sz="2400" b="1" dirty="0">
                 <a:solidFill>
                   <a:srgbClr val="FFD166"/>
                 </a:solidFill>
@@ -17502,7 +17214,7 @@
               <a:t>90</a:t>
             </a:r>
             <a:r>
-              <a:rPr lang="en-US" sz="1700" dirty="0">
+              <a:rPr lang="en-US" sz="2400" b="1" dirty="0">
                 <a:solidFill>
                   <a:srgbClr val="E0E0E0"/>
                 </a:solidFill>
@@ -17512,14 +17224,14 @@
               </a:rPr>
               <a:t>)</a:t>
             </a:r>
-            <a:endParaRPr lang="en-US" sz="1700" dirty="0"/>
+            <a:endParaRPr lang="en-US" sz="2400" b="1" dirty="0"/>
           </a:p>
           <a:p>
             <a:pPr marL="0" indent="0" algn="l">
               <a:buNone/>
             </a:pPr>
             <a:r>
-              <a:rPr lang="en-US" sz="1700" dirty="0">
+              <a:rPr lang="en-US" sz="2400" b="1" dirty="0">
                 <a:solidFill>
                   <a:srgbClr val="E0E0E0"/>
                 </a:solidFill>
@@ -17530,7 +17242,7 @@
               <a:t>t.</a:t>
             </a:r>
             <a:r>
-              <a:rPr lang="en-US" sz="1700" dirty="0">
+              <a:rPr lang="en-US" sz="2400" b="1" dirty="0">
                 <a:solidFill>
                   <a:srgbClr val="7FDBFF"/>
                 </a:solidFill>
@@ -17541,7 +17253,7 @@
               <a:t>forward</a:t>
             </a:r>
             <a:r>
-              <a:rPr lang="en-US" sz="1700" dirty="0">
+              <a:rPr lang="en-US" sz="2400" b="1" dirty="0">
                 <a:solidFill>
                   <a:srgbClr val="E0E0E0"/>
                 </a:solidFill>
@@ -17552,7 +17264,7 @@
               <a:t>(</a:t>
             </a:r>
             <a:r>
-              <a:rPr lang="en-US" sz="1700" dirty="0">
+              <a:rPr lang="en-US" sz="2400" b="1" dirty="0">
                 <a:solidFill>
                   <a:srgbClr val="FFD166"/>
                 </a:solidFill>
@@ -17563,7 +17275,7 @@
               <a:t>100</a:t>
             </a:r>
             <a:r>
-              <a:rPr lang="en-US" sz="1700" dirty="0">
+              <a:rPr lang="en-US" sz="2400" b="1" dirty="0">
                 <a:solidFill>
                   <a:srgbClr val="E0E0E0"/>
                 </a:solidFill>
@@ -17573,14 +17285,14 @@
               </a:rPr>
               <a:t>)</a:t>
             </a:r>
-            <a:endParaRPr lang="en-US" sz="1700" dirty="0"/>
+            <a:endParaRPr lang="en-US" sz="2400" b="1" dirty="0"/>
           </a:p>
           <a:p>
             <a:pPr marL="0" indent="0" algn="l">
               <a:buNone/>
             </a:pPr>
             <a:r>
-              <a:rPr lang="en-US" sz="1700" dirty="0">
+              <a:rPr lang="en-US" sz="2400" b="1" dirty="0">
                 <a:solidFill>
                   <a:srgbClr val="E0E0E0"/>
                 </a:solidFill>
@@ -17591,7 +17303,7 @@
               <a:t>t.</a:t>
             </a:r>
             <a:r>
-              <a:rPr lang="en-US" sz="1700" dirty="0">
+              <a:rPr lang="en-US" sz="2400" b="1" dirty="0">
                 <a:solidFill>
                   <a:srgbClr val="7FDBFF"/>
                 </a:solidFill>
@@ -17602,7 +17314,7 @@
               <a:t>left</a:t>
             </a:r>
             <a:r>
-              <a:rPr lang="en-US" sz="1700" dirty="0">
+              <a:rPr lang="en-US" sz="2400" b="1" dirty="0">
                 <a:solidFill>
                   <a:srgbClr val="E0E0E0"/>
                 </a:solidFill>
@@ -17613,7 +17325,7 @@
               <a:t>(</a:t>
             </a:r>
             <a:r>
-              <a:rPr lang="en-US" sz="1700" dirty="0">
+              <a:rPr lang="en-US" sz="2400" b="1" dirty="0">
                 <a:solidFill>
                   <a:srgbClr val="FFD166"/>
                 </a:solidFill>
@@ -17624,7 +17336,7 @@
               <a:t>90</a:t>
             </a:r>
             <a:r>
-              <a:rPr lang="en-US" sz="1700" dirty="0">
+              <a:rPr lang="en-US" sz="2400" b="1" dirty="0">
                 <a:solidFill>
                   <a:srgbClr val="E0E0E0"/>
                 </a:solidFill>
@@ -17634,7 +17346,7 @@
               </a:rPr>
               <a:t>)</a:t>
             </a:r>
-            <a:endParaRPr lang="en-US" sz="1700" dirty="0"/>
+            <a:endParaRPr lang="en-US" sz="2400" b="1" dirty="0"/>
           </a:p>
         </p:txBody>
       </p:sp>
@@ -17733,7 +17445,7 @@
               <a:buNone/>
             </a:pPr>
             <a:r>
-              <a:rPr lang="en-US" sz="1800" dirty="0">
+              <a:rPr lang="en-US" sz="2400" b="1" dirty="0">
                 <a:solidFill>
                   <a:srgbClr val="FF9F1C"/>
                 </a:solidFill>
@@ -17744,7 +17456,7 @@
               <a:t>for</a:t>
             </a:r>
             <a:r>
-              <a:rPr lang="en-US" sz="1800" dirty="0">
+              <a:rPr lang="en-US" sz="2400" b="1" dirty="0">
                 <a:solidFill>
                   <a:srgbClr val="E0E0E0"/>
                 </a:solidFill>
@@ -17752,10 +17464,32 @@
                 <a:ea typeface="Courier New" pitchFamily="34" charset="-122"/>
                 <a:cs typeface="Courier New" pitchFamily="34" charset="-120"/>
               </a:rPr>
-              <a:t> i </a:t>
-            </a:r>
-            <a:r>
-              <a:rPr lang="en-US" sz="1800" dirty="0">
+              <a:t> </a:t>
+            </a:r>
+            <a:r>
+              <a:rPr lang="en-US" sz="2400" b="1" dirty="0" err="1">
+                <a:solidFill>
+                  <a:srgbClr val="E0E0E0"/>
+                </a:solidFill>
+                <a:latin typeface="Courier New" pitchFamily="34" charset="0"/>
+                <a:ea typeface="Courier New" pitchFamily="34" charset="-122"/>
+                <a:cs typeface="Courier New" pitchFamily="34" charset="-120"/>
+              </a:rPr>
+              <a:t>i</a:t>
+            </a:r>
+            <a:r>
+              <a:rPr lang="en-US" sz="2400" b="1" dirty="0">
+                <a:solidFill>
+                  <a:srgbClr val="E0E0E0"/>
+                </a:solidFill>
+                <a:latin typeface="Courier New" pitchFamily="34" charset="0"/>
+                <a:ea typeface="Courier New" pitchFamily="34" charset="-122"/>
+                <a:cs typeface="Courier New" pitchFamily="34" charset="-120"/>
+              </a:rPr>
+              <a:t> </a:t>
+            </a:r>
+            <a:r>
+              <a:rPr lang="en-US" sz="2400" b="1" dirty="0">
                 <a:solidFill>
                   <a:srgbClr val="FF9F1C"/>
                 </a:solidFill>
@@ -17766,7 +17500,7 @@
               <a:t>in</a:t>
             </a:r>
             <a:r>
-              <a:rPr lang="en-US" sz="1800" dirty="0">
+              <a:rPr lang="en-US" sz="2400" b="1" dirty="0">
                 <a:solidFill>
                   <a:srgbClr val="E0E0E0"/>
                 </a:solidFill>
@@ -17777,7 +17511,7 @@
               <a:t> </a:t>
             </a:r>
             <a:r>
-              <a:rPr lang="en-US" sz="1800" dirty="0">
+              <a:rPr lang="en-US" sz="2400" b="1" dirty="0">
                 <a:solidFill>
                   <a:srgbClr val="7FDBFF"/>
                 </a:solidFill>
@@ -17788,7 +17522,7 @@
               <a:t>range</a:t>
             </a:r>
             <a:r>
-              <a:rPr lang="en-US" sz="1800" dirty="0">
+              <a:rPr lang="en-US" sz="2400" b="1" dirty="0">
                 <a:solidFill>
                   <a:srgbClr val="E0E0E0"/>
                 </a:solidFill>
@@ -17799,7 +17533,7 @@
               <a:t>(</a:t>
             </a:r>
             <a:r>
-              <a:rPr lang="en-US" sz="1800" dirty="0">
+              <a:rPr lang="en-US" sz="2400" b="1" dirty="0">
                 <a:solidFill>
                   <a:srgbClr val="FFD166"/>
                 </a:solidFill>
@@ -17810,7 +17544,7 @@
               <a:t>4</a:t>
             </a:r>
             <a:r>
-              <a:rPr lang="en-US" sz="1800" dirty="0">
+              <a:rPr lang="en-US" sz="2400" b="1" dirty="0">
                 <a:solidFill>
                   <a:srgbClr val="E0E0E0"/>
                 </a:solidFill>
@@ -17820,14 +17554,14 @@
               </a:rPr>
               <a:t>):</a:t>
             </a:r>
-            <a:endParaRPr lang="en-US" sz="1800" dirty="0"/>
+            <a:endParaRPr lang="en-US" sz="2400" b="1" dirty="0"/>
           </a:p>
           <a:p>
             <a:pPr marL="0" indent="0" algn="l">
               <a:buNone/>
             </a:pPr>
             <a:r>
-              <a:rPr lang="en-US" sz="1800" dirty="0">
+              <a:rPr lang="en-US" sz="2400" b="1" dirty="0">
                 <a:solidFill>
                   <a:srgbClr val="E0E0E0"/>
                 </a:solidFill>
@@ -17835,10 +17569,21 @@
                 <a:ea typeface="Courier New" pitchFamily="34" charset="-122"/>
                 <a:cs typeface="Courier New" pitchFamily="34" charset="-120"/>
               </a:rPr>
-              <a:t>    t.</a:t>
-            </a:r>
-            <a:r>
-              <a:rPr lang="en-US" sz="1800" dirty="0">
+              <a:t>    </a:t>
+            </a:r>
+            <a:r>
+              <a:rPr lang="en-US" sz="2400" b="1" dirty="0" err="1">
+                <a:solidFill>
+                  <a:srgbClr val="E0E0E0"/>
+                </a:solidFill>
+                <a:latin typeface="Courier New" pitchFamily="34" charset="0"/>
+                <a:ea typeface="Courier New" pitchFamily="34" charset="-122"/>
+                <a:cs typeface="Courier New" pitchFamily="34" charset="-120"/>
+              </a:rPr>
+              <a:t>t.</a:t>
+            </a:r>
+            <a:r>
+              <a:rPr lang="en-US" sz="2400" b="1" dirty="0" err="1">
                 <a:solidFill>
                   <a:srgbClr val="7FDBFF"/>
                 </a:solidFill>
@@ -17849,7 +17594,7 @@
               <a:t>forward</a:t>
             </a:r>
             <a:r>
-              <a:rPr lang="en-US" sz="1800" dirty="0">
+              <a:rPr lang="en-US" sz="2400" b="1" dirty="0">
                 <a:solidFill>
                   <a:srgbClr val="E0E0E0"/>
                 </a:solidFill>
@@ -17860,7 +17605,7 @@
               <a:t>(</a:t>
             </a:r>
             <a:r>
-              <a:rPr lang="en-US" sz="1800" dirty="0">
+              <a:rPr lang="en-US" sz="2400" b="1" dirty="0">
                 <a:solidFill>
                   <a:srgbClr val="FFD166"/>
                 </a:solidFill>
@@ -17871,7 +17616,7 @@
               <a:t>100</a:t>
             </a:r>
             <a:r>
-              <a:rPr lang="en-US" sz="1800" dirty="0">
+              <a:rPr lang="en-US" sz="2400" b="1" dirty="0">
                 <a:solidFill>
                   <a:srgbClr val="E0E0E0"/>
                 </a:solidFill>
@@ -17881,14 +17626,14 @@
               </a:rPr>
               <a:t>)</a:t>
             </a:r>
-            <a:endParaRPr lang="en-US" sz="1800" dirty="0"/>
+            <a:endParaRPr lang="en-US" sz="2400" b="1" dirty="0"/>
           </a:p>
           <a:p>
             <a:pPr marL="0" indent="0" algn="l">
               <a:buNone/>
             </a:pPr>
             <a:r>
-              <a:rPr lang="en-US" sz="1800" dirty="0">
+              <a:rPr lang="en-US" sz="2400" b="1" dirty="0">
                 <a:solidFill>
                   <a:srgbClr val="E0E0E0"/>
                 </a:solidFill>
@@ -17896,10 +17641,21 @@
                 <a:ea typeface="Courier New" pitchFamily="34" charset="-122"/>
                 <a:cs typeface="Courier New" pitchFamily="34" charset="-120"/>
               </a:rPr>
-              <a:t>    t.</a:t>
-            </a:r>
-            <a:r>
-              <a:rPr lang="en-US" sz="1800" dirty="0">
+              <a:t>    </a:t>
+            </a:r>
+            <a:r>
+              <a:rPr lang="en-US" sz="2400" b="1" dirty="0" err="1">
+                <a:solidFill>
+                  <a:srgbClr val="E0E0E0"/>
+                </a:solidFill>
+                <a:latin typeface="Courier New" pitchFamily="34" charset="0"/>
+                <a:ea typeface="Courier New" pitchFamily="34" charset="-122"/>
+                <a:cs typeface="Courier New" pitchFamily="34" charset="-120"/>
+              </a:rPr>
+              <a:t>t.</a:t>
+            </a:r>
+            <a:r>
+              <a:rPr lang="en-US" sz="2400" b="1" dirty="0" err="1">
                 <a:solidFill>
                   <a:srgbClr val="7FDBFF"/>
                 </a:solidFill>
@@ -17910,7 +17666,7 @@
               <a:t>left</a:t>
             </a:r>
             <a:r>
-              <a:rPr lang="en-US" sz="1800" dirty="0">
+              <a:rPr lang="en-US" sz="2400" b="1" dirty="0">
                 <a:solidFill>
                   <a:srgbClr val="E0E0E0"/>
                 </a:solidFill>
@@ -17921,7 +17677,7 @@
               <a:t>(</a:t>
             </a:r>
             <a:r>
-              <a:rPr lang="en-US" sz="1800" dirty="0">
+              <a:rPr lang="en-US" sz="2400" b="1" dirty="0">
                 <a:solidFill>
                   <a:srgbClr val="FFD166"/>
                 </a:solidFill>
@@ -17932,7 +17688,7 @@
               <a:t>90</a:t>
             </a:r>
             <a:r>
-              <a:rPr lang="en-US" sz="1800" dirty="0">
+              <a:rPr lang="en-US" sz="2400" b="1" dirty="0">
                 <a:solidFill>
                   <a:srgbClr val="E0E0E0"/>
                 </a:solidFill>
@@ -17942,7 +17698,7 @@
               </a:rPr>
               <a:t>)</a:t>
             </a:r>
-            <a:endParaRPr lang="en-US" sz="1800" dirty="0"/>
+            <a:endParaRPr lang="en-US" sz="2400" b="1" dirty="0"/>
           </a:p>
         </p:txBody>
       </p:sp>
@@ -18106,7 +17862,7 @@
           </a:prstGeom>
           <a:extLst>
             <a:ext uri="{C572A759-6A51-4108-AA02-DFA0A04FC94B}">
-              <ma14:wrappingTextBoxFlag xmlns="" xmlns:ma14="http://schemas.microsoft.com/office/mac/drawingml/2011/main" val="0"/>
+              <ma14:wrappingTextBoxFlag xmlns:ma14="http://schemas.microsoft.com/office/mac/drawingml/2011/main" xmlns="" val="0"/>
             </a:ext>
           </a:extLst>
         </p:spPr>
